--- a/IMS_Project_Presentation.pptx
+++ b/IMS_Project_Presentation.pptx
@@ -14,9 +14,12 @@
     <p:sldId id="262" r:id="rId8"/>
     <p:sldId id="263" r:id="rId9"/>
     <p:sldId id="264" r:id="rId10"/>
+    <p:sldId id="265" r:id="rId11"/>
+    <p:sldId id="266" r:id="rId12"/>
+    <p:sldId id="267" r:id="rId13"/>
   </p:sldIdLst>
   <p:notesMasterIdLst>
-    <p:notesMasterId r:id="rId11"/>
+    <p:notesMasterId r:id="rId14"/>
   </p:notesMasterIdLst>
   <p:sldSz cx="9144000" cy="5143500"/>
   <p:notesSz cx="5143500" cy="9144000"/>
@@ -534,6 +537,270 @@
             <a:fld id="{F7021451-1387-4CA6-816F-3879F97B5CBC}" type="slidenum">
               <a:rPr lang="en-US"/>
               <a:t>1</a:t>
+            </a:fld>
+            <a:endParaRPr lang="en-US"/>
+          </a:p>
+        </p:txBody>
+      </p:sp>
+    </p:spTree>
+    <p:extLst>
+      <p:ext uri="{BB962C8B-B14F-4D97-AF65-F5344CB8AC3E}">
+        <p14:creationId xmlns:p14="http://schemas.microsoft.com/office/powerpoint/2010/main" val="1024086991"/>
+      </p:ext>
+    </p:extLst>
+  </p:cSld>
+  <p:clrMapOvr>
+    <a:masterClrMapping/>
+  </p:clrMapOvr>
+</p:notes>
+</file>
+
+<file path=ppt/notesSlides/notesSlide10.xml><?xml version="1.0" encoding="utf-8"?>
+<p:notes xmlns:a="http://schemas.openxmlformats.org/drawingml/2006/main" xmlns:r="http://schemas.openxmlformats.org/officeDocument/2006/relationships" xmlns:p="http://schemas.openxmlformats.org/presentationml/2006/main">
+  <p:cSld>
+    <p:spTree>
+      <p:nvGrpSpPr>
+        <p:cNvPr id="1" name=""/>
+        <p:cNvGrpSpPr/>
+        <p:nvPr/>
+      </p:nvGrpSpPr>
+      <p:grpSpPr>
+        <a:xfrm>
+          <a:off x="0" y="0"/>
+          <a:ext cx="0" cy="0"/>
+          <a:chOff x="0" y="0"/>
+          <a:chExt cx="0" cy="0"/>
+        </a:xfrm>
+      </p:grpSpPr>
+      <p:sp>
+        <p:nvSpPr>
+          <p:cNvPr id="2" name="Slide Image Placeholder 1"/>
+          <p:cNvSpPr>
+            <a:spLocks noGrp="1" noRot="1" noChangeAspect="1"/>
+          </p:cNvSpPr>
+          <p:nvPr>
+            <p:ph type="sldImg"/>
+          </p:nvPr>
+        </p:nvSpPr>
+        <p:spPr/>
+      </p:sp>
+      <p:sp>
+        <p:nvSpPr>
+          <p:cNvPr id="3" name="Notes Placeholder 2"/>
+          <p:cNvSpPr>
+            <a:spLocks noGrp="1"/>
+          </p:cNvSpPr>
+          <p:nvPr>
+            <p:ph type="body" idx="1"/>
+          </p:nvPr>
+        </p:nvSpPr>
+        <p:spPr/>
+        <p:txBody>
+          <a:bodyPr/>
+          <a:lstStyle/>
+          <a:p>
+            <a:r>
+              <a:rPr lang="en-US" dirty="0"/>
+              <a:t/>
+            </a:r>
+            <a:endParaRPr lang="en-US" dirty="0"/>
+          </a:p>
+        </p:txBody>
+      </p:sp>
+      <p:sp>
+        <p:nvSpPr>
+          <p:cNvPr id="4" name="Slide Number Placeholder 3"/>
+          <p:cNvSpPr>
+            <a:spLocks noGrp="1"/>
+          </p:cNvSpPr>
+          <p:nvPr>
+            <p:ph type="sldNum" sz="quarter" idx="10"/>
+          </p:nvPr>
+        </p:nvSpPr>
+        <p:spPr/>
+        <p:txBody>
+          <a:bodyPr/>
+          <a:lstStyle/>
+          <a:p>
+            <a:fld id="{F7021451-1387-4CA6-816F-3879F97B5CBC}" type="slidenum">
+              <a:rPr lang="en-US"/>
+              <a:t>10</a:t>
+            </a:fld>
+            <a:endParaRPr lang="en-US"/>
+          </a:p>
+        </p:txBody>
+      </p:sp>
+    </p:spTree>
+    <p:extLst>
+      <p:ext uri="{BB962C8B-B14F-4D97-AF65-F5344CB8AC3E}">
+        <p14:creationId xmlns:p14="http://schemas.microsoft.com/office/powerpoint/2010/main" val="1024086991"/>
+      </p:ext>
+    </p:extLst>
+  </p:cSld>
+  <p:clrMapOvr>
+    <a:masterClrMapping/>
+  </p:clrMapOvr>
+</p:notes>
+</file>
+
+<file path=ppt/notesSlides/notesSlide11.xml><?xml version="1.0" encoding="utf-8"?>
+<p:notes xmlns:a="http://schemas.openxmlformats.org/drawingml/2006/main" xmlns:r="http://schemas.openxmlformats.org/officeDocument/2006/relationships" xmlns:p="http://schemas.openxmlformats.org/presentationml/2006/main">
+  <p:cSld>
+    <p:spTree>
+      <p:nvGrpSpPr>
+        <p:cNvPr id="1" name=""/>
+        <p:cNvGrpSpPr/>
+        <p:nvPr/>
+      </p:nvGrpSpPr>
+      <p:grpSpPr>
+        <a:xfrm>
+          <a:off x="0" y="0"/>
+          <a:ext cx="0" cy="0"/>
+          <a:chOff x="0" y="0"/>
+          <a:chExt cx="0" cy="0"/>
+        </a:xfrm>
+      </p:grpSpPr>
+      <p:sp>
+        <p:nvSpPr>
+          <p:cNvPr id="2" name="Slide Image Placeholder 1"/>
+          <p:cNvSpPr>
+            <a:spLocks noGrp="1" noRot="1" noChangeAspect="1"/>
+          </p:cNvSpPr>
+          <p:nvPr>
+            <p:ph type="sldImg"/>
+          </p:nvPr>
+        </p:nvSpPr>
+        <p:spPr/>
+      </p:sp>
+      <p:sp>
+        <p:nvSpPr>
+          <p:cNvPr id="3" name="Notes Placeholder 2"/>
+          <p:cNvSpPr>
+            <a:spLocks noGrp="1"/>
+          </p:cNvSpPr>
+          <p:nvPr>
+            <p:ph type="body" idx="1"/>
+          </p:nvPr>
+        </p:nvSpPr>
+        <p:spPr/>
+        <p:txBody>
+          <a:bodyPr/>
+          <a:lstStyle/>
+          <a:p>
+            <a:r>
+              <a:rPr lang="en-US" dirty="0"/>
+              <a:t/>
+            </a:r>
+            <a:endParaRPr lang="en-US" dirty="0"/>
+          </a:p>
+        </p:txBody>
+      </p:sp>
+      <p:sp>
+        <p:nvSpPr>
+          <p:cNvPr id="4" name="Slide Number Placeholder 3"/>
+          <p:cNvSpPr>
+            <a:spLocks noGrp="1"/>
+          </p:cNvSpPr>
+          <p:nvPr>
+            <p:ph type="sldNum" sz="quarter" idx="10"/>
+          </p:nvPr>
+        </p:nvSpPr>
+        <p:spPr/>
+        <p:txBody>
+          <a:bodyPr/>
+          <a:lstStyle/>
+          <a:p>
+            <a:fld id="{F7021451-1387-4CA6-816F-3879F97B5CBC}" type="slidenum">
+              <a:rPr lang="en-US"/>
+              <a:t>11</a:t>
+            </a:fld>
+            <a:endParaRPr lang="en-US"/>
+          </a:p>
+        </p:txBody>
+      </p:sp>
+    </p:spTree>
+    <p:extLst>
+      <p:ext uri="{BB962C8B-B14F-4D97-AF65-F5344CB8AC3E}">
+        <p14:creationId xmlns:p14="http://schemas.microsoft.com/office/powerpoint/2010/main" val="1024086991"/>
+      </p:ext>
+    </p:extLst>
+  </p:cSld>
+  <p:clrMapOvr>
+    <a:masterClrMapping/>
+  </p:clrMapOvr>
+</p:notes>
+</file>
+
+<file path=ppt/notesSlides/notesSlide12.xml><?xml version="1.0" encoding="utf-8"?>
+<p:notes xmlns:a="http://schemas.openxmlformats.org/drawingml/2006/main" xmlns:r="http://schemas.openxmlformats.org/officeDocument/2006/relationships" xmlns:p="http://schemas.openxmlformats.org/presentationml/2006/main">
+  <p:cSld>
+    <p:spTree>
+      <p:nvGrpSpPr>
+        <p:cNvPr id="1" name=""/>
+        <p:cNvGrpSpPr/>
+        <p:nvPr/>
+      </p:nvGrpSpPr>
+      <p:grpSpPr>
+        <a:xfrm>
+          <a:off x="0" y="0"/>
+          <a:ext cx="0" cy="0"/>
+          <a:chOff x="0" y="0"/>
+          <a:chExt cx="0" cy="0"/>
+        </a:xfrm>
+      </p:grpSpPr>
+      <p:sp>
+        <p:nvSpPr>
+          <p:cNvPr id="2" name="Slide Image Placeholder 1"/>
+          <p:cNvSpPr>
+            <a:spLocks noGrp="1" noRot="1" noChangeAspect="1"/>
+          </p:cNvSpPr>
+          <p:nvPr>
+            <p:ph type="sldImg"/>
+          </p:nvPr>
+        </p:nvSpPr>
+        <p:spPr/>
+      </p:sp>
+      <p:sp>
+        <p:nvSpPr>
+          <p:cNvPr id="3" name="Notes Placeholder 2"/>
+          <p:cNvSpPr>
+            <a:spLocks noGrp="1"/>
+          </p:cNvSpPr>
+          <p:nvPr>
+            <p:ph type="body" idx="1"/>
+          </p:nvPr>
+        </p:nvSpPr>
+        <p:spPr/>
+        <p:txBody>
+          <a:bodyPr/>
+          <a:lstStyle/>
+          <a:p>
+            <a:r>
+              <a:rPr lang="en-US" dirty="0"/>
+              <a:t/>
+            </a:r>
+            <a:endParaRPr lang="en-US" dirty="0"/>
+          </a:p>
+        </p:txBody>
+      </p:sp>
+      <p:sp>
+        <p:nvSpPr>
+          <p:cNvPr id="4" name="Slide Number Placeholder 3"/>
+          <p:cNvSpPr>
+            <a:spLocks noGrp="1"/>
+          </p:cNvSpPr>
+          <p:nvPr>
+            <p:ph type="sldNum" sz="quarter" idx="10"/>
+          </p:nvPr>
+        </p:nvSpPr>
+        <p:spPr/>
+        <p:txBody>
+          <a:bodyPr/>
+          <a:lstStyle/>
+          <a:p>
+            <a:fld id="{F7021451-1387-4CA6-816F-3879F97B5CBC}" type="slidenum">
+              <a:rPr lang="en-US"/>
+              <a:t>12</a:t>
             </a:fld>
             <a:endParaRPr lang="en-US"/>
           </a:p>
@@ -1695,6 +1962,151 @@
           </a:p>
         </p:txBody>
       </p:sp>
+    </p:spTree>
+  </p:cSld>
+  <p:clrMapOvr>
+    <a:masterClrMapping/>
+  </p:clrMapOvr>
+</p:sld>
+</file>
+
+<file path=ppt/slides/slide10.xml><?xml version="1.0" encoding="utf-8"?>
+<p:sld xmlns:a="http://schemas.openxmlformats.org/drawingml/2006/main" xmlns:r="http://schemas.openxmlformats.org/officeDocument/2006/relationships" xmlns:p="http://schemas.openxmlformats.org/presentationml/2006/main">
+  <p:cSld name="Slide 10">
+    <p:spTree>
+      <p:nvGrpSpPr>
+        <p:cNvPr id="1" name=""/>
+        <p:cNvGrpSpPr/>
+        <p:nvPr/>
+      </p:nvGrpSpPr>
+      <p:grpSpPr>
+        <a:xfrm>
+          <a:off x="0" y="0"/>
+          <a:ext cx="0" cy="0"/>
+          <a:chOff x="0" y="0"/>
+          <a:chExt cx="0" cy="0"/>
+        </a:xfrm>
+      </p:grpSpPr>
+      <p:sp>
+        <p:nvSpPr>
+          <p:cNvPr id="2" name="Text 0"/>
+          <p:cNvSpPr/>
+          <p:nvPr/>
+        </p:nvSpPr>
+        <p:spPr>
+          <a:xfrm>
+            <a:off x="457200" y="457200"/>
+            <a:ext cx="8229600" cy="0"/>
+          </a:xfrm>
+          <a:prstGeom prst="rect">
+            <a:avLst/>
+          </a:prstGeom>
+          <a:noFill/>
+          <a:ln/>
+        </p:spPr>
+        <p:txBody>
+          <a:bodyPr wrap="square" rtlCol="0" anchor="ctr"/>
+          <a:lstStyle/>
+          <a:p>
+            <a:pPr indent="0" marL="0">
+              <a:buNone/>
+            </a:pPr>
+            <a:r>
+              <a:rPr lang="en-US" sz="3600" b="1" dirty="0">
+                <a:solidFill>
+                  <a:srgbClr val="0F172A"/>
+                </a:solidFill>
+              </a:rPr>
+              <a:t>Budget for the Website</a:t>
+            </a:r>
+            <a:endParaRPr lang="en-US" sz="3600" dirty="0"/>
+          </a:p>
+        </p:txBody>
+      </p:sp>
+      <p:sp>
+        <p:nvSpPr>
+          <p:cNvPr id="3" name="Text 1"/>
+          <p:cNvSpPr/>
+          <p:nvPr/>
+        </p:nvSpPr>
+        <p:spPr>
+          <a:xfrm>
+            <a:off x="457200" y="1188720"/>
+            <a:ext cx="8229600" cy="0"/>
+          </a:xfrm>
+          <a:prstGeom prst="rect">
+            <a:avLst/>
+          </a:prstGeom>
+          <a:noFill/>
+          <a:ln/>
+        </p:spPr>
+        <p:txBody>
+          <a:bodyPr wrap="square" rtlCol="0" anchor="ctr"/>
+          <a:lstStyle/>
+          <a:p>
+            <a:pPr indent="0" marL="0">
+              <a:buNone/>
+            </a:pPr>
+            <a:r>
+              <a:rPr lang="en-US" sz="2000" b="1" dirty="0">
+                <a:solidFill>
+                  <a:srgbClr val="333333"/>
+                </a:solidFill>
+              </a:rPr>
+              <a:t>Estimated Annual Infrastructure &amp; Service Costs:</a:t>
+            </a:r>
+            <a:endParaRPr lang="en-US" sz="2000" dirty="0"/>
+          </a:p>
+        </p:txBody>
+      </p:sp>
+      <p:sp>
+        <p:nvSpPr>
+          <p:cNvPr id="4" name="Text 2"/>
+          <p:cNvSpPr/>
+          <p:nvPr/>
+        </p:nvSpPr>
+        <p:spPr>
+          <a:xfrm>
+            <a:off x="457200" y="1828800"/>
+            <a:ext cx="8229600" cy="0"/>
+          </a:xfrm>
+          <a:prstGeom prst="rect">
+            <a:avLst/>
+          </a:prstGeom>
+          <a:noFill/>
+          <a:ln/>
+        </p:spPr>
+        <p:txBody>
+          <a:bodyPr wrap="square" lIns="127000" tIns="127000" rIns="127000" bIns="127000" rtlCol="0" anchor="ctr"/>
+          <a:lstStyle/>
+          <a:p>
+            <a:pPr marL="342900" indent="-342900">
+              <a:buSzPct val="100000"/>
+              <a:buChar char="•"/>
+            </a:pPr>
+            <a:r>
+              <a:rPr lang="en-US" sz="1800" b="1" dirty="0">
+                <a:solidFill>
+                  <a:srgbClr val="333333"/>
+                </a:solidFill>
+              </a:rPr>
+              <a:t>Cloud Hosting (AWS/Vercel): </a:t>
+            </a:r>
+            <a:pPr indent="0" marL="0">
+              <a:buNone/>
+            </a:pPr>
+            <a:r>
+              <a:rPr lang="en-US" sz="1800" dirty="0">
+                <a:solidFill>
+                  <a:srgbClr val="333333"/>
+                </a:solidFill>
+              </a:rPr>
+              <a:t>~$1,200 - $2,500/year (Based on traffic/load).</a:t>
+            </a:r>
+            <a:endParaRPr lang="en-US" sz="1800" dirty="0"/>
+          </a:p>
+        </p:txBody>
+      </p:sp>
       <p:sp>
         <p:nvSpPr>
           <p:cNvPr id="5" name="Text 3"/>
@@ -1703,8 +2115,225 @@
         </p:nvSpPr>
         <p:spPr>
           <a:xfrm>
-            <a:off x="914400" y="4114800"/>
-            <a:ext cx="7315200" cy="0"/>
+            <a:off x="457200" y="2377440"/>
+            <a:ext cx="8229600" cy="0"/>
+          </a:xfrm>
+          <a:prstGeom prst="rect">
+            <a:avLst/>
+          </a:prstGeom>
+          <a:noFill/>
+          <a:ln/>
+        </p:spPr>
+        <p:txBody>
+          <a:bodyPr wrap="square" lIns="127000" tIns="127000" rIns="127000" bIns="127000" rtlCol="0" anchor="ctr"/>
+          <a:lstStyle/>
+          <a:p>
+            <a:pPr marL="342900" indent="-342900">
+              <a:buSzPct val="100000"/>
+              <a:buChar char="•"/>
+            </a:pPr>
+            <a:r>
+              <a:rPr lang="en-US" sz="1800" b="1" dirty="0">
+                <a:solidFill>
+                  <a:srgbClr val="333333"/>
+                </a:solidFill>
+              </a:rPr>
+              <a:t>Database Management (PostgreSQL): </a:t>
+            </a:r>
+            <a:pPr indent="0" marL="0">
+              <a:buNone/>
+            </a:pPr>
+            <a:r>
+              <a:rPr lang="en-US" sz="1800" dirty="0">
+                <a:solidFill>
+                  <a:srgbClr val="333333"/>
+                </a:solidFill>
+              </a:rPr>
+              <a:t>~$600 - $1,200/year (Managed instances).</a:t>
+            </a:r>
+            <a:endParaRPr lang="en-US" sz="1800" dirty="0"/>
+          </a:p>
+        </p:txBody>
+      </p:sp>
+      <p:sp>
+        <p:nvSpPr>
+          <p:cNvPr id="6" name="Text 4"/>
+          <p:cNvSpPr/>
+          <p:nvPr/>
+        </p:nvSpPr>
+        <p:spPr>
+          <a:xfrm>
+            <a:off x="457200" y="2926080"/>
+            <a:ext cx="8229600" cy="0"/>
+          </a:xfrm>
+          <a:prstGeom prst="rect">
+            <a:avLst/>
+          </a:prstGeom>
+          <a:noFill/>
+          <a:ln/>
+        </p:spPr>
+        <p:txBody>
+          <a:bodyPr wrap="square" lIns="127000" tIns="127000" rIns="127000" bIns="127000" rtlCol="0" anchor="ctr"/>
+          <a:lstStyle/>
+          <a:p>
+            <a:pPr marL="342900" indent="-342900">
+              <a:buSzPct val="100000"/>
+              <a:buChar char="•"/>
+            </a:pPr>
+            <a:r>
+              <a:rPr lang="en-US" sz="1800" b="1" dirty="0">
+                <a:solidFill>
+                  <a:srgbClr val="333333"/>
+                </a:solidFill>
+              </a:rPr>
+              <a:t>Media &amp; Asset Storage (Cloudinary): </a:t>
+            </a:r>
+            <a:pPr indent="0" marL="0">
+              <a:buNone/>
+            </a:pPr>
+            <a:r>
+              <a:rPr lang="en-US" sz="1800" dirty="0">
+                <a:solidFill>
+                  <a:srgbClr val="333333"/>
+                </a:solidFill>
+              </a:rPr>
+              <a:t>~$500/year (For heavy document/image uploads).</a:t>
+            </a:r>
+            <a:endParaRPr lang="en-US" sz="1800" dirty="0"/>
+          </a:p>
+        </p:txBody>
+      </p:sp>
+      <p:sp>
+        <p:nvSpPr>
+          <p:cNvPr id="7" name="Text 5"/>
+          <p:cNvSpPr/>
+          <p:nvPr/>
+        </p:nvSpPr>
+        <p:spPr>
+          <a:xfrm>
+            <a:off x="457200" y="3474720"/>
+            <a:ext cx="8229600" cy="0"/>
+          </a:xfrm>
+          <a:prstGeom prst="rect">
+            <a:avLst/>
+          </a:prstGeom>
+          <a:noFill/>
+          <a:ln/>
+        </p:spPr>
+        <p:txBody>
+          <a:bodyPr wrap="square" lIns="127000" tIns="127000" rIns="127000" bIns="127000" rtlCol="0" anchor="ctr"/>
+          <a:lstStyle/>
+          <a:p>
+            <a:pPr marL="342900" indent="-342900">
+              <a:buSzPct val="100000"/>
+              <a:buChar char="•"/>
+            </a:pPr>
+            <a:r>
+              <a:rPr lang="en-US" sz="1800" b="1" dirty="0">
+                <a:solidFill>
+                  <a:srgbClr val="333333"/>
+                </a:solidFill>
+              </a:rPr>
+              <a:t>AI &amp; APIs (Vapi AI, Email Services): </a:t>
+            </a:r>
+            <a:pPr indent="0" marL="0">
+              <a:buNone/>
+            </a:pPr>
+            <a:r>
+              <a:rPr lang="en-US" sz="1800" dirty="0">
+                <a:solidFill>
+                  <a:srgbClr val="333333"/>
+                </a:solidFill>
+              </a:rPr>
+              <a:t>~$800/year (Usage-based pricing).</a:t>
+            </a:r>
+            <a:endParaRPr lang="en-US" sz="1800" dirty="0"/>
+          </a:p>
+        </p:txBody>
+      </p:sp>
+      <p:sp>
+        <p:nvSpPr>
+          <p:cNvPr id="8" name="Text 6"/>
+          <p:cNvSpPr/>
+          <p:nvPr/>
+        </p:nvSpPr>
+        <p:spPr>
+          <a:xfrm>
+            <a:off x="457200" y="4023360"/>
+            <a:ext cx="8229600" cy="0"/>
+          </a:xfrm>
+          <a:prstGeom prst="rect">
+            <a:avLst/>
+          </a:prstGeom>
+          <a:noFill/>
+          <a:ln/>
+        </p:spPr>
+        <p:txBody>
+          <a:bodyPr wrap="square" lIns="127000" tIns="127000" rIns="127000" bIns="127000" rtlCol="0" anchor="ctr"/>
+          <a:lstStyle/>
+          <a:p>
+            <a:pPr marL="342900" indent="-342900">
+              <a:buSzPct val="100000"/>
+              <a:buChar char="•"/>
+            </a:pPr>
+            <a:r>
+              <a:rPr lang="en-US" sz="1800" b="1" dirty="0">
+                <a:solidFill>
+                  <a:srgbClr val="333333"/>
+                </a:solidFill>
+              </a:rPr>
+              <a:t>Maintenance &amp; Security: </a:t>
+            </a:r>
+            <a:pPr indent="0" marL="0">
+              <a:buNone/>
+            </a:pPr>
+            <a:r>
+              <a:rPr lang="en-US" sz="1800" dirty="0">
+                <a:solidFill>
+                  <a:srgbClr val="333333"/>
+                </a:solidFill>
+              </a:rPr>
+              <a:t>Ongoing IT personnel and security audits.</a:t>
+            </a:r>
+            <a:endParaRPr lang="en-US" sz="1800" dirty="0"/>
+          </a:p>
+        </p:txBody>
+      </p:sp>
+    </p:spTree>
+  </p:cSld>
+  <p:clrMapOvr>
+    <a:masterClrMapping/>
+  </p:clrMapOvr>
+</p:sld>
+</file>
+
+<file path=ppt/slides/slide11.xml><?xml version="1.0" encoding="utf-8"?>
+<p:sld xmlns:a="http://schemas.openxmlformats.org/drawingml/2006/main" xmlns:r="http://schemas.openxmlformats.org/officeDocument/2006/relationships" xmlns:p="http://schemas.openxmlformats.org/presentationml/2006/main">
+  <p:cSld name="Slide 11">
+    <p:spTree>
+      <p:nvGrpSpPr>
+        <p:cNvPr id="1" name=""/>
+        <p:cNvGrpSpPr/>
+        <p:nvPr/>
+      </p:nvGrpSpPr>
+      <p:grpSpPr>
+        <a:xfrm>
+          <a:off x="0" y="0"/>
+          <a:ext cx="0" cy="0"/>
+          <a:chOff x="0" y="0"/>
+          <a:chExt cx="0" cy="0"/>
+        </a:xfrm>
+      </p:grpSpPr>
+      <p:sp>
+        <p:nvSpPr>
+          <p:cNvPr id="2" name="Text 0"/>
+          <p:cNvSpPr/>
+          <p:nvPr/>
+        </p:nvSpPr>
+        <p:spPr>
+          <a:xfrm>
+            <a:off x="457200" y="457200"/>
+            <a:ext cx="8229600" cy="0"/>
           </a:xfrm>
           <a:prstGeom prst="rect">
             <a:avLst/>
@@ -1716,18 +2345,461 @@
           <a:bodyPr wrap="square" rtlCol="0" anchor="ctr"/>
           <a:lstStyle/>
           <a:p>
-            <a:pPr algn="ctr" indent="0" marL="0">
-              <a:buNone/>
-            </a:pPr>
-            <a:r>
-              <a:rPr lang="en-US" sz="1600" dirty="0">
-                <a:solidFill>
-                  <a:srgbClr val="CBD5E1"/>
-                </a:solidFill>
-              </a:rPr>
-              <a:t>Created for: BAUET / Academic Institutions</a:t>
-            </a:r>
-            <a:endParaRPr lang="en-US" sz="1600" dirty="0"/>
+            <a:pPr indent="0" marL="0">
+              <a:buNone/>
+            </a:pPr>
+            <a:r>
+              <a:rPr lang="en-US" sz="3600" b="1" dirty="0">
+                <a:solidFill>
+                  <a:srgbClr val="0F172A"/>
+                </a:solidFill>
+              </a:rPr>
+              <a:t>Conclusion</a:t>
+            </a:r>
+            <a:endParaRPr lang="en-US" sz="3600" dirty="0"/>
+          </a:p>
+        </p:txBody>
+      </p:sp>
+      <p:sp>
+        <p:nvSpPr>
+          <p:cNvPr id="3" name="Text 1"/>
+          <p:cNvSpPr/>
+          <p:nvPr/>
+        </p:nvSpPr>
+        <p:spPr>
+          <a:xfrm>
+            <a:off x="457200" y="1371600"/>
+            <a:ext cx="8229600" cy="0"/>
+          </a:xfrm>
+          <a:prstGeom prst="rect">
+            <a:avLst/>
+          </a:prstGeom>
+          <a:noFill/>
+          <a:ln/>
+        </p:spPr>
+        <p:txBody>
+          <a:bodyPr wrap="square" rtlCol="0" anchor="ctr"/>
+          <a:lstStyle/>
+          <a:p>
+            <a:pPr indent="0" marL="0">
+              <a:buNone/>
+            </a:pPr>
+            <a:r>
+              <a:rPr lang="en-US" sz="2200" b="1" dirty="0">
+                <a:solidFill>
+                  <a:srgbClr val="0369A1"/>
+                </a:solidFill>
+              </a:rPr>
+              <a:t>IMS fundamentally transforms how academic institutions operate.</a:t>
+            </a:r>
+            <a:endParaRPr lang="en-US" sz="2200" dirty="0"/>
+          </a:p>
+        </p:txBody>
+      </p:sp>
+      <p:sp>
+        <p:nvSpPr>
+          <p:cNvPr id="4" name="Text 2"/>
+          <p:cNvSpPr/>
+          <p:nvPr/>
+        </p:nvSpPr>
+        <p:spPr>
+          <a:xfrm>
+            <a:off x="457200" y="2103120"/>
+            <a:ext cx="8229600" cy="0"/>
+          </a:xfrm>
+          <a:prstGeom prst="rect">
+            <a:avLst/>
+          </a:prstGeom>
+          <a:noFill/>
+          <a:ln/>
+        </p:spPr>
+        <p:txBody>
+          <a:bodyPr wrap="square" lIns="127000" tIns="127000" rIns="127000" bIns="127000" rtlCol="0" anchor="ctr"/>
+          <a:lstStyle/>
+          <a:p>
+            <a:pPr marL="342900" indent="-342900">
+              <a:buSzPct val="100000"/>
+              <a:buChar char="•"/>
+            </a:pPr>
+            <a:r>
+              <a:rPr lang="en-US" sz="2000" b="1" dirty="0">
+                <a:solidFill>
+                  <a:srgbClr val="333333"/>
+                </a:solidFill>
+              </a:rPr>
+              <a:t>Centralizes Data: </a:t>
+            </a:r>
+            <a:pPr indent="0" marL="0">
+              <a:buNone/>
+            </a:pPr>
+            <a:r>
+              <a:rPr lang="en-US" sz="2000" dirty="0">
+                <a:solidFill>
+                  <a:srgbClr val="333333"/>
+                </a:solidFill>
+              </a:rPr>
+              <a:t>Moves away from fragmented systems into a single source of truth.</a:t>
+            </a:r>
+            <a:endParaRPr lang="en-US" sz="2000" dirty="0"/>
+          </a:p>
+        </p:txBody>
+      </p:sp>
+      <p:sp>
+        <p:nvSpPr>
+          <p:cNvPr id="5" name="Text 3"/>
+          <p:cNvSpPr/>
+          <p:nvPr/>
+        </p:nvSpPr>
+        <p:spPr>
+          <a:xfrm>
+            <a:off x="457200" y="2834640"/>
+            <a:ext cx="8229600" cy="0"/>
+          </a:xfrm>
+          <a:prstGeom prst="rect">
+            <a:avLst/>
+          </a:prstGeom>
+          <a:noFill/>
+          <a:ln/>
+        </p:spPr>
+        <p:txBody>
+          <a:bodyPr wrap="square" lIns="127000" tIns="127000" rIns="127000" bIns="127000" rtlCol="0" anchor="ctr"/>
+          <a:lstStyle/>
+          <a:p>
+            <a:pPr marL="342900" indent="-342900">
+              <a:buSzPct val="100000"/>
+              <a:buChar char="•"/>
+            </a:pPr>
+            <a:r>
+              <a:rPr lang="en-US" sz="2000" b="1" dirty="0">
+                <a:solidFill>
+                  <a:srgbClr val="333333"/>
+                </a:solidFill>
+              </a:rPr>
+              <a:t>Empowers Users: </a:t>
+            </a:r>
+            <a:pPr indent="0" marL="0">
+              <a:buNone/>
+            </a:pPr>
+            <a:r>
+              <a:rPr lang="en-US" sz="2000" dirty="0">
+                <a:solidFill>
+                  <a:srgbClr val="333333"/>
+                </a:solidFill>
+              </a:rPr>
+              <a:t>Provides real-time analytics, mobile access, and automated governance.</a:t>
+            </a:r>
+            <a:endParaRPr lang="en-US" sz="2000" dirty="0"/>
+          </a:p>
+        </p:txBody>
+      </p:sp>
+      <p:sp>
+        <p:nvSpPr>
+          <p:cNvPr id="6" name="Text 4"/>
+          <p:cNvSpPr/>
+          <p:nvPr/>
+        </p:nvSpPr>
+        <p:spPr>
+          <a:xfrm>
+            <a:off x="457200" y="3566160"/>
+            <a:ext cx="8229600" cy="0"/>
+          </a:xfrm>
+          <a:prstGeom prst="rect">
+            <a:avLst/>
+          </a:prstGeom>
+          <a:noFill/>
+          <a:ln/>
+        </p:spPr>
+        <p:txBody>
+          <a:bodyPr wrap="square" lIns="127000" tIns="127000" rIns="127000" bIns="127000" rtlCol="0" anchor="ctr"/>
+          <a:lstStyle/>
+          <a:p>
+            <a:pPr marL="342900" indent="-342900">
+              <a:buSzPct val="100000"/>
+              <a:buChar char="•"/>
+            </a:pPr>
+            <a:r>
+              <a:rPr lang="en-US" sz="2000" b="1" dirty="0">
+                <a:solidFill>
+                  <a:srgbClr val="333333"/>
+                </a:solidFill>
+              </a:rPr>
+              <a:t>Scalable Foundation: </a:t>
+            </a:r>
+            <a:pPr indent="0" marL="0">
+              <a:buNone/>
+            </a:pPr>
+            <a:r>
+              <a:rPr lang="en-US" sz="2000" dirty="0">
+                <a:solidFill>
+                  <a:srgbClr val="333333"/>
+                </a:solidFill>
+              </a:rPr>
+              <a:t>Built on modern web technologies ensuring longevity and adaptability for future expansions.</a:t>
+            </a:r>
+            <a:endParaRPr lang="en-US" sz="2000" dirty="0"/>
+          </a:p>
+        </p:txBody>
+      </p:sp>
+    </p:spTree>
+  </p:cSld>
+  <p:clrMapOvr>
+    <a:masterClrMapping/>
+  </p:clrMapOvr>
+</p:sld>
+</file>
+
+<file path=ppt/slides/slide12.xml><?xml version="1.0" encoding="utf-8"?>
+<p:sld xmlns:a="http://schemas.openxmlformats.org/drawingml/2006/main" xmlns:r="http://schemas.openxmlformats.org/officeDocument/2006/relationships" xmlns:p="http://schemas.openxmlformats.org/presentationml/2006/main">
+  <p:cSld name="Slide 12">
+    <p:spTree>
+      <p:nvGrpSpPr>
+        <p:cNvPr id="1" name=""/>
+        <p:cNvGrpSpPr/>
+        <p:nvPr/>
+      </p:nvGrpSpPr>
+      <p:grpSpPr>
+        <a:xfrm>
+          <a:off x="0" y="0"/>
+          <a:ext cx="0" cy="0"/>
+          <a:chOff x="0" y="0"/>
+          <a:chExt cx="0" cy="0"/>
+        </a:xfrm>
+      </p:grpSpPr>
+      <p:sp>
+        <p:nvSpPr>
+          <p:cNvPr id="2" name="Text 0"/>
+          <p:cNvSpPr/>
+          <p:nvPr/>
+        </p:nvSpPr>
+        <p:spPr>
+          <a:xfrm>
+            <a:off x="457200" y="457200"/>
+            <a:ext cx="8229600" cy="0"/>
+          </a:xfrm>
+          <a:prstGeom prst="rect">
+            <a:avLst/>
+          </a:prstGeom>
+          <a:noFill/>
+          <a:ln/>
+        </p:spPr>
+        <p:txBody>
+          <a:bodyPr wrap="square" rtlCol="0" anchor="ctr"/>
+          <a:lstStyle/>
+          <a:p>
+            <a:pPr indent="0" marL="0">
+              <a:buNone/>
+            </a:pPr>
+            <a:r>
+              <a:rPr lang="en-US" sz="3600" b="1" dirty="0">
+                <a:solidFill>
+                  <a:srgbClr val="0F172A"/>
+                </a:solidFill>
+              </a:rPr>
+              <a:t>Reference</a:t>
+            </a:r>
+            <a:endParaRPr lang="en-US" sz="3600" dirty="0"/>
+          </a:p>
+        </p:txBody>
+      </p:sp>
+      <p:sp>
+        <p:nvSpPr>
+          <p:cNvPr id="3" name="Text 1"/>
+          <p:cNvSpPr/>
+          <p:nvPr/>
+        </p:nvSpPr>
+        <p:spPr>
+          <a:xfrm>
+            <a:off x="457200" y="1371600"/>
+            <a:ext cx="8229600" cy="0"/>
+          </a:xfrm>
+          <a:prstGeom prst="rect">
+            <a:avLst/>
+          </a:prstGeom>
+          <a:noFill/>
+          <a:ln/>
+        </p:spPr>
+        <p:txBody>
+          <a:bodyPr wrap="square" lIns="127000" tIns="127000" rIns="127000" bIns="127000" rtlCol="0" anchor="ctr"/>
+          <a:lstStyle/>
+          <a:p>
+            <a:pPr marL="342900" indent="-342900">
+              <a:buSzPct val="100000"/>
+              <a:buChar char="•"/>
+            </a:pPr>
+            <a:r>
+              <a:rPr lang="en-US" sz="2000" b="1" dirty="0">
+                <a:solidFill>
+                  <a:srgbClr val="333333"/>
+                </a:solidFill>
+              </a:rPr>
+              <a:t>Project Repository: </a:t>
+            </a:r>
+            <a:pPr indent="0" marL="0">
+              <a:buNone/>
+            </a:pPr>
+            <a:r>
+              <a:rPr lang="en-US" sz="2000" dirty="0">
+                <a:solidFill>
+                  <a:srgbClr val="333333"/>
+                </a:solidFill>
+              </a:rPr>
+              <a:t>https://github.com/NoorAbdullah02/IMS</a:t>
+            </a:r>
+            <a:endParaRPr lang="en-US" sz="2000" dirty="0"/>
+          </a:p>
+        </p:txBody>
+      </p:sp>
+      <p:sp>
+        <p:nvSpPr>
+          <p:cNvPr id="4" name="Text 2"/>
+          <p:cNvSpPr/>
+          <p:nvPr/>
+        </p:nvSpPr>
+        <p:spPr>
+          <a:xfrm>
+            <a:off x="457200" y="2011680"/>
+            <a:ext cx="8229600" cy="0"/>
+          </a:xfrm>
+          <a:prstGeom prst="rect">
+            <a:avLst/>
+          </a:prstGeom>
+          <a:noFill/>
+          <a:ln/>
+        </p:spPr>
+        <p:txBody>
+          <a:bodyPr wrap="square" lIns="127000" tIns="127000" rIns="127000" bIns="127000" rtlCol="0" anchor="ctr"/>
+          <a:lstStyle/>
+          <a:p>
+            <a:pPr indent="0" marL="0">
+              <a:buNone/>
+            </a:pPr>
+            <a:r>
+              <a:rPr lang="en-US" sz="2000" b="1" dirty="0">
+                <a:solidFill>
+                  <a:srgbClr val="333333"/>
+                </a:solidFill>
+              </a:rPr>
+              <a:t>Tech Stack Documentation:</a:t>
+            </a:r>
+            <a:endParaRPr lang="en-US" sz="2000" dirty="0"/>
+          </a:p>
+        </p:txBody>
+      </p:sp>
+      <p:sp>
+        <p:nvSpPr>
+          <p:cNvPr id="5" name="Text 3"/>
+          <p:cNvSpPr/>
+          <p:nvPr/>
+        </p:nvSpPr>
+        <p:spPr>
+          <a:xfrm>
+            <a:off x="457200" y="2377440"/>
+            <a:ext cx="8229600" cy="0"/>
+          </a:xfrm>
+          <a:prstGeom prst="rect">
+            <a:avLst/>
+          </a:prstGeom>
+          <a:noFill/>
+          <a:ln/>
+        </p:spPr>
+        <p:txBody>
+          <a:bodyPr wrap="square" lIns="127000" tIns="127000" rIns="127000" bIns="127000" rtlCol="0" anchor="ctr"/>
+          <a:lstStyle/>
+          <a:p>
+            <a:pPr marL="254000" indent="-254000">
+              <a:buSzPct val="100000"/>
+              <a:buChar char="•"/>
+            </a:pPr>
+            <a:r>
+              <a:rPr lang="en-US" sz="1800" dirty="0">
+                <a:solidFill>
+                  <a:srgbClr val="555555"/>
+                </a:solidFill>
+              </a:rPr>
+              <a:t>Vite: https://vitejs.dev/</a:t>
+            </a:r>
+            <a:pPr indent="0" marL="0">
+              <a:buNone/>
+            </a:pPr>
+            <a:r>
+              <a:rPr lang="en-US" sz="1800" dirty="0">
+                <a:solidFill>
+                  <a:srgbClr val="555555"/>
+                </a:solidFill>
+              </a:rPr>
+              <a:t>Express.js: https://expressjs.com/</a:t>
+            </a:r>
+            <a:pPr indent="0" marL="0">
+              <a:buNone/>
+            </a:pPr>
+            <a:r>
+              <a:rPr lang="en-US" sz="1800" dirty="0">
+                <a:solidFill>
+                  <a:srgbClr val="555555"/>
+                </a:solidFill>
+              </a:rPr>
+              <a:t>PostgreSQL: https://www.postgresql.org/</a:t>
+            </a:r>
+            <a:pPr indent="0" marL="0">
+              <a:buNone/>
+            </a:pPr>
+            <a:r>
+              <a:rPr lang="en-US" sz="1800" dirty="0">
+                <a:solidFill>
+                  <a:srgbClr val="555555"/>
+                </a:solidFill>
+              </a:rPr>
+              <a:t>Socket.IO: https://socket.io/</a:t>
+            </a:r>
+            <a:pPr indent="0" marL="0">
+              <a:buNone/>
+            </a:pPr>
+            <a:r>
+              <a:rPr lang="en-US" sz="1800" dirty="0">
+                <a:solidFill>
+                  <a:srgbClr val="555555"/>
+                </a:solidFill>
+              </a:rPr>
+              <a:t>Drizzle ORM: https://orm.drizzle.team/</a:t>
+            </a:r>
+            <a:endParaRPr lang="en-US" sz="1800" dirty="0"/>
+          </a:p>
+        </p:txBody>
+      </p:sp>
+      <p:sp>
+        <p:nvSpPr>
+          <p:cNvPr id="6" name="Text 4"/>
+          <p:cNvSpPr/>
+          <p:nvPr/>
+        </p:nvSpPr>
+        <p:spPr>
+          <a:xfrm>
+            <a:off x="457200" y="3840480"/>
+            <a:ext cx="8229600" cy="0"/>
+          </a:xfrm>
+          <a:prstGeom prst="rect">
+            <a:avLst/>
+          </a:prstGeom>
+          <a:noFill/>
+          <a:ln/>
+        </p:spPr>
+        <p:txBody>
+          <a:bodyPr wrap="square" lIns="127000" tIns="127000" rIns="127000" bIns="127000" rtlCol="0" anchor="ctr"/>
+          <a:lstStyle/>
+          <a:p>
+            <a:pPr marL="342900" indent="-342900">
+              <a:buSzPct val="100000"/>
+              <a:buChar char="•"/>
+            </a:pPr>
+            <a:r>
+              <a:rPr lang="en-US" sz="1800" dirty="0">
+                <a:solidFill>
+                  <a:srgbClr val="333333"/>
+                </a:solidFill>
+              </a:rPr>
+              <a:t>IMS README &amp; Architectural Blueprints</a:t>
+            </a:r>
+            <a:endParaRPr lang="en-US" sz="1800" dirty="0"/>
           </a:p>
         </p:txBody>
       </p:sp>
@@ -1786,7 +2858,7 @@
                   <a:srgbClr val="0F172A"/>
                 </a:solidFill>
               </a:rPr>
-              <a:t>Problem Statement</a:t>
+              <a:t>Outline</a:t>
             </a:r>
             <a:endParaRPr lang="en-US" sz="3600" dirty="0"/>
           </a:p>
@@ -1800,187 +2872,161 @@
         </p:nvSpPr>
         <p:spPr>
           <a:xfrm>
-            <a:off x="457200" y="1371600"/>
-            <a:ext cx="8229600" cy="0"/>
-          </a:xfrm>
-          <a:prstGeom prst="rect">
-            <a:avLst/>
-          </a:prstGeom>
-          <a:noFill/>
-          <a:ln/>
-        </p:spPr>
-        <p:txBody>
-          <a:bodyPr wrap="square" lIns="127000" tIns="127000" rIns="127000" bIns="127000" rtlCol="0" anchor="ctr"/>
+            <a:off x="914400" y="1371600"/>
+            <a:ext cx="7315200" cy="0"/>
+          </a:xfrm>
+          <a:prstGeom prst="rect">
+            <a:avLst/>
+          </a:prstGeom>
+          <a:noFill/>
+          <a:ln/>
+        </p:spPr>
+        <p:txBody>
+          <a:bodyPr wrap="square" rtlCol="0" anchor="ctr"/>
           <a:lstStyle/>
           <a:p>
             <a:pPr marL="342900" indent="-342900">
+              <a:lnSpc>
+                <a:spcPts val="3500"/>
+              </a:lnSpc>
               <a:buSzPct val="100000"/>
               <a:buChar char="•"/>
             </a:pPr>
             <a:r>
-              <a:rPr lang="en-US" sz="2000" b="1" dirty="0">
-                <a:solidFill>
-                  <a:srgbClr val="333333"/>
-                </a:solidFill>
-              </a:rPr>
-              <a:t>Legacy Systems: </a:t>
-            </a:r>
-            <a:pPr indent="0" marL="0">
-              <a:buNone/>
-            </a:pPr>
-            <a:r>
-              <a:rPr lang="en-US" sz="2000" dirty="0">
-                <a:solidFill>
-                  <a:srgbClr val="333333"/>
-                </a:solidFill>
-              </a:rPr>
-              <a:t>Slow, outdated portals built on technologies from the 2000s.</a:t>
-            </a:r>
-            <a:endParaRPr lang="en-US" sz="2000" dirty="0"/>
-          </a:p>
-        </p:txBody>
-      </p:sp>
-      <p:sp>
-        <p:nvSpPr>
-          <p:cNvPr id="4" name="Text 2"/>
-          <p:cNvSpPr/>
-          <p:nvPr/>
-        </p:nvSpPr>
-        <p:spPr>
-          <a:xfrm>
-            <a:off x="457200" y="2011680"/>
-            <a:ext cx="8229600" cy="0"/>
-          </a:xfrm>
-          <a:prstGeom prst="rect">
-            <a:avLst/>
-          </a:prstGeom>
-          <a:noFill/>
-          <a:ln/>
-        </p:spPr>
-        <p:txBody>
-          <a:bodyPr wrap="square" lIns="127000" tIns="127000" rIns="127000" bIns="127000" rtlCol="0" anchor="ctr"/>
-          <a:lstStyle/>
-          <a:p>
-            <a:pPr marL="342900" indent="-342900">
-              <a:buSzPct val="100000"/>
-              <a:buChar char="•"/>
-            </a:pPr>
-            <a:r>
-              <a:rPr lang="en-US" sz="2000" b="1" dirty="0">
-                <a:solidFill>
-                  <a:srgbClr val="333333"/>
-                </a:solidFill>
-              </a:rPr>
-              <a:t>Poor User Experience: </a:t>
-            </a:r>
-            <a:pPr indent="0" marL="0">
-              <a:buNone/>
-            </a:pPr>
-            <a:r>
-              <a:rPr lang="en-US" sz="2000" dirty="0">
-                <a:solidFill>
-                  <a:srgbClr val="333333"/>
-                </a:solidFill>
-              </a:rPr>
-              <a:t>Lack of mobile responsiveness and confusing navigation.</a:t>
-            </a:r>
-            <a:endParaRPr lang="en-US" sz="2000" dirty="0"/>
-          </a:p>
-        </p:txBody>
-      </p:sp>
-      <p:sp>
-        <p:nvSpPr>
-          <p:cNvPr id="5" name="Text 3"/>
-          <p:cNvSpPr/>
-          <p:nvPr/>
-        </p:nvSpPr>
-        <p:spPr>
-          <a:xfrm>
-            <a:off x="457200" y="2651760"/>
-            <a:ext cx="8229600" cy="0"/>
-          </a:xfrm>
-          <a:prstGeom prst="rect">
-            <a:avLst/>
-          </a:prstGeom>
-          <a:noFill/>
-          <a:ln/>
-        </p:spPr>
-        <p:txBody>
-          <a:bodyPr wrap="square" lIns="127000" tIns="127000" rIns="127000" bIns="127000" rtlCol="0" anchor="ctr"/>
-          <a:lstStyle/>
-          <a:p>
-            <a:pPr marL="342900" indent="-342900">
-              <a:buSzPct val="100000"/>
-              <a:buChar char="•"/>
-            </a:pPr>
-            <a:r>
-              <a:rPr lang="en-US" sz="2000" b="1" dirty="0">
-                <a:solidFill>
-                  <a:srgbClr val="333333"/>
-                </a:solidFill>
-              </a:rPr>
-              <a:t>Segregated Systems: </a:t>
-            </a:r>
-            <a:pPr indent="0" marL="0">
-              <a:buNone/>
-            </a:pPr>
-            <a:r>
-              <a:rPr lang="en-US" sz="2000" dirty="0">
-                <a:solidFill>
-                  <a:srgbClr val="333333"/>
-                </a:solidFill>
-              </a:rPr>
-              <a:t>Attendance, grades, fees, materials all in different platforms.</a:t>
-            </a:r>
-            <a:endParaRPr lang="en-US" sz="2000" dirty="0"/>
-          </a:p>
-        </p:txBody>
-      </p:sp>
-      <p:sp>
-        <p:nvSpPr>
-          <p:cNvPr id="6" name="Text 4"/>
-          <p:cNvSpPr/>
-          <p:nvPr/>
-        </p:nvSpPr>
-        <p:spPr>
-          <a:xfrm>
-            <a:off x="457200" y="3291840"/>
-            <a:ext cx="8229600" cy="0"/>
-          </a:xfrm>
-          <a:prstGeom prst="rect">
-            <a:avLst/>
-          </a:prstGeom>
-          <a:noFill/>
-          <a:ln/>
-        </p:spPr>
-        <p:txBody>
-          <a:bodyPr wrap="square" lIns="127000" tIns="127000" rIns="127000" bIns="127000" rtlCol="0" anchor="ctr"/>
-          <a:lstStyle/>
-          <a:p>
-            <a:pPr marL="342900" indent="-342900">
-              <a:buSzPct val="100000"/>
-              <a:buChar char="•"/>
-            </a:pPr>
-            <a:r>
-              <a:rPr lang="en-US" sz="2000" b="1" dirty="0">
-                <a:solidFill>
-                  <a:srgbClr val="333333"/>
-                </a:solidFill>
-              </a:rPr>
-              <a:t>Weak Capabilities: </a:t>
-            </a:r>
-            <a:pPr indent="0" marL="0">
-              <a:buNone/>
-            </a:pPr>
-            <a:r>
-              <a:rPr lang="en-US" sz="2000" dirty="0">
-                <a:solidFill>
-                  <a:srgbClr val="333333"/>
-                </a:solidFill>
-              </a:rPr>
-              <a:t>No modern auth, no real-time updates, no analytics.</a:t>
-            </a:r>
-            <a:endParaRPr lang="en-US" sz="2000" dirty="0"/>
+              <a:rPr lang="en-US" sz="2200" dirty="0">
+                <a:solidFill>
+                  <a:srgbClr val="333333"/>
+                </a:solidFill>
+              </a:rPr>
+              <a:t>Introduction</a:t>
+            </a:r>
+            <a:pPr indent="0" marL="0">
+              <a:lnSpc>
+                <a:spcPts val="3500"/>
+              </a:lnSpc>
+              <a:buNone/>
+            </a:pPr>
+            <a:r>
+              <a:rPr lang="en-US" sz="2200" dirty="0">
+                <a:solidFill>
+                  <a:srgbClr val="333333"/>
+                </a:solidFill>
+              </a:rPr>
+              <a:t>Literature Review</a:t>
+            </a:r>
+            <a:pPr indent="0" marL="0">
+              <a:lnSpc>
+                <a:spcPts val="3500"/>
+              </a:lnSpc>
+              <a:buNone/>
+            </a:pPr>
+            <a:r>
+              <a:rPr lang="en-US" sz="2200" dirty="0">
+                <a:solidFill>
+                  <a:srgbClr val="333333"/>
+                </a:solidFill>
+              </a:rPr>
+              <a:t>Problem Statement</a:t>
+            </a:r>
+            <a:pPr indent="0" marL="0">
+              <a:lnSpc>
+                <a:spcPts val="3500"/>
+              </a:lnSpc>
+              <a:buNone/>
+            </a:pPr>
+            <a:r>
+              <a:rPr lang="en-US" sz="2200" dirty="0">
+                <a:solidFill>
+                  <a:srgbClr val="333333"/>
+                </a:solidFill>
+              </a:rPr>
+              <a:t>Objectives</a:t>
+            </a:r>
+            <a:pPr indent="0" marL="0">
+              <a:lnSpc>
+                <a:spcPts val="3500"/>
+              </a:lnSpc>
+              <a:buNone/>
+            </a:pPr>
+            <a:r>
+              <a:rPr lang="en-US" sz="2200" dirty="0">
+                <a:solidFill>
+                  <a:srgbClr val="333333"/>
+                </a:solidFill>
+              </a:rPr>
+              <a:t>Methodology</a:t>
+            </a:r>
+            <a:pPr indent="0" marL="0">
+              <a:lnSpc>
+                <a:spcPts val="3500"/>
+              </a:lnSpc>
+              <a:buNone/>
+            </a:pPr>
+            <a:r>
+              <a:rPr lang="en-US" sz="2200" dirty="0">
+                <a:solidFill>
+                  <a:srgbClr val="333333"/>
+                </a:solidFill>
+              </a:rPr>
+              <a:t>Result</a:t>
+            </a:r>
+            <a:pPr indent="0" marL="0">
+              <a:lnSpc>
+                <a:spcPts val="3500"/>
+              </a:lnSpc>
+              <a:buNone/>
+            </a:pPr>
+            <a:r>
+              <a:rPr lang="en-US" sz="2200" dirty="0">
+                <a:solidFill>
+                  <a:srgbClr val="333333"/>
+                </a:solidFill>
+              </a:rPr>
+              <a:t>Future Work</a:t>
+            </a:r>
+            <a:pPr indent="0" marL="0">
+              <a:lnSpc>
+                <a:spcPts val="3500"/>
+              </a:lnSpc>
+              <a:buNone/>
+            </a:pPr>
+            <a:r>
+              <a:rPr lang="en-US" sz="2200" dirty="0">
+                <a:solidFill>
+                  <a:srgbClr val="333333"/>
+                </a:solidFill>
+              </a:rPr>
+              <a:t>Budget for the website</a:t>
+            </a:r>
+            <a:pPr indent="0" marL="0">
+              <a:lnSpc>
+                <a:spcPts val="3500"/>
+              </a:lnSpc>
+              <a:buNone/>
+            </a:pPr>
+            <a:r>
+              <a:rPr lang="en-US" sz="2200" dirty="0">
+                <a:solidFill>
+                  <a:srgbClr val="333333"/>
+                </a:solidFill>
+              </a:rPr>
+              <a:t>Conclusion</a:t>
+            </a:r>
+            <a:pPr indent="0" marL="0">
+              <a:lnSpc>
+                <a:spcPts val="3500"/>
+              </a:lnSpc>
+              <a:buNone/>
+            </a:pPr>
+            <a:r>
+              <a:rPr lang="en-US" sz="2200" dirty="0">
+                <a:solidFill>
+                  <a:srgbClr val="333333"/>
+                </a:solidFill>
+              </a:rPr>
+              <a:t>Reference</a:t>
+            </a:r>
+            <a:endParaRPr lang="en-US" sz="2200" dirty="0"/>
           </a:p>
         </p:txBody>
       </p:sp>
@@ -2039,7 +3085,7 @@
                   <a:srgbClr val="0F172A"/>
                 </a:solidFill>
               </a:rPr>
-              <a:t>Proposed Solution: IMS</a:t>
+              <a:t>Introduction</a:t>
             </a:r>
             <a:endParaRPr lang="en-US" sz="3600" dirty="0"/>
           </a:p>
@@ -2054,42 +3100,6 @@
         <p:spPr>
           <a:xfrm>
             <a:off x="457200" y="1371600"/>
-            <a:ext cx="8229600" cy="0"/>
-          </a:xfrm>
-          <a:prstGeom prst="rect">
-            <a:avLst/>
-          </a:prstGeom>
-          <a:noFill/>
-          <a:ln/>
-        </p:spPr>
-        <p:txBody>
-          <a:bodyPr wrap="square" lIns="127000" tIns="127000" rIns="127000" bIns="127000" rtlCol="0" anchor="ctr"/>
-          <a:lstStyle/>
-          <a:p>
-            <a:pPr indent="0" marL="0">
-              <a:buNone/>
-            </a:pPr>
-            <a:r>
-              <a:rPr lang="en-US" sz="2200" dirty="0">
-                <a:solidFill>
-                  <a:srgbClr val="333333"/>
-                </a:solidFill>
-              </a:rPr>
-              <a:t>A unified, cloud-native platform that consolidates all academic workflows into a single, elegant interface.</a:t>
-            </a:r>
-            <a:endParaRPr lang="en-US" sz="2200" dirty="0"/>
-          </a:p>
-        </p:txBody>
-      </p:sp>
-      <p:sp>
-        <p:nvSpPr>
-          <p:cNvPr id="4" name="Text 2"/>
-          <p:cNvSpPr/>
-          <p:nvPr/>
-        </p:nvSpPr>
-        <p:spPr>
-          <a:xfrm>
-            <a:off x="457200" y="2286000"/>
             <a:ext cx="8229600" cy="0"/>
           </a:xfrm>
           <a:prstGeom prst="rect">
@@ -2107,37 +3117,37 @@
               <a:buChar char="•"/>
             </a:pPr>
             <a:r>
-              <a:rPr lang="en-US" sz="1800" b="1" dirty="0">
-                <a:solidFill>
-                  <a:srgbClr val="333333"/>
-                </a:solidFill>
-              </a:rPr>
-              <a:t>Lightning-Fast Performance </a:t>
-            </a:r>
-            <a:pPr indent="0" marL="0">
-              <a:buNone/>
-            </a:pPr>
-            <a:r>
-              <a:rPr lang="en-US" sz="1800" dirty="0">
-                <a:solidFill>
-                  <a:srgbClr val="333333"/>
-                </a:solidFill>
-              </a:rPr>
-              <a:t>- Shell Architecture with modular rendering.</a:t>
-            </a:r>
-            <a:endParaRPr lang="en-US" sz="1800" dirty="0"/>
-          </a:p>
-        </p:txBody>
-      </p:sp>
-      <p:sp>
-        <p:nvSpPr>
-          <p:cNvPr id="5" name="Text 3"/>
-          <p:cNvSpPr/>
-          <p:nvPr/>
-        </p:nvSpPr>
-        <p:spPr>
-          <a:xfrm>
-            <a:off x="457200" y="2743200"/>
+              <a:rPr lang="en-US" sz="2000" b="1" dirty="0">
+                <a:solidFill>
+                  <a:srgbClr val="333333"/>
+                </a:solidFill>
+              </a:rPr>
+              <a:t>What is IMS?</a:t>
+            </a:r>
+            <a:pPr indent="0" marL="0">
+              <a:buNone/>
+            </a:pPr>
+            <a:r>
+              <a:rPr lang="en-US" sz="2000" dirty="0">
+                <a:solidFill>
+                  <a:srgbClr val="333333"/>
+                </a:solidFill>
+              </a:rPr>
+              <a:t> A comprehensive, modern academic platform designed to revolutionize educational institution management.</a:t>
+            </a:r>
+            <a:endParaRPr lang="en-US" sz="2000" dirty="0"/>
+          </a:p>
+        </p:txBody>
+      </p:sp>
+      <p:sp>
+        <p:nvSpPr>
+          <p:cNvPr id="4" name="Text 2"/>
+          <p:cNvSpPr/>
+          <p:nvPr/>
+        </p:nvSpPr>
+        <p:spPr>
+          <a:xfrm>
+            <a:off x="457200" y="2286000"/>
             <a:ext cx="8229600" cy="0"/>
           </a:xfrm>
           <a:prstGeom prst="rect">
@@ -2155,31 +3165,31 @@
               <a:buChar char="•"/>
             </a:pPr>
             <a:r>
-              <a:rPr lang="en-US" sz="1800" b="1" dirty="0">
-                <a:solidFill>
-                  <a:srgbClr val="333333"/>
-                </a:solidFill>
-              </a:rPr>
-              <a:t>Premium UI/UX </a:t>
-            </a:r>
-            <a:pPr indent="0" marL="0">
-              <a:buNone/>
-            </a:pPr>
-            <a:r>
-              <a:rPr lang="en-US" sz="1800" dirty="0">
-                <a:solidFill>
-                  <a:srgbClr val="333333"/>
-                </a:solidFill>
-              </a:rPr>
-              <a:t>- Glassmorphic design with smooth animations.</a:t>
-            </a:r>
-            <a:endParaRPr lang="en-US" sz="1800" dirty="0"/>
-          </a:p>
-        </p:txBody>
-      </p:sp>
-      <p:sp>
-        <p:nvSpPr>
-          <p:cNvPr id="6" name="Text 4"/>
+              <a:rPr lang="en-US" sz="2000" b="1" dirty="0">
+                <a:solidFill>
+                  <a:srgbClr val="333333"/>
+                </a:solidFill>
+              </a:rPr>
+              <a:t>Target Audience:</a:t>
+            </a:r>
+            <a:pPr indent="0" marL="0">
+              <a:buNone/>
+            </a:pPr>
+            <a:r>
+              <a:rPr lang="en-US" sz="2000" dirty="0">
+                <a:solidFill>
+                  <a:srgbClr val="333333"/>
+                </a:solidFill>
+              </a:rPr>
+              <a:t> Students, Teachers, Coordinators, Dept Heads, Finance Officers, and Super Admins.</a:t>
+            </a:r>
+            <a:endParaRPr lang="en-US" sz="2000" dirty="0"/>
+          </a:p>
+        </p:txBody>
+      </p:sp>
+      <p:sp>
+        <p:nvSpPr>
+          <p:cNvPr id="5" name="Text 3"/>
           <p:cNvSpPr/>
           <p:nvPr/>
         </p:nvSpPr>
@@ -2203,73 +3213,25 @@
               <a:buChar char="•"/>
             </a:pPr>
             <a:r>
-              <a:rPr lang="en-US" sz="1800" b="1" dirty="0">
-                <a:solidFill>
-                  <a:srgbClr val="333333"/>
-                </a:solidFill>
-              </a:rPr>
-              <a:t>Enterprise-Grade Security </a:t>
-            </a:r>
-            <a:pPr indent="0" marL="0">
-              <a:buNone/>
-            </a:pPr>
-            <a:r>
-              <a:rPr lang="en-US" sz="1800" dirty="0">
-                <a:solidFill>
-                  <a:srgbClr val="333333"/>
-                </a:solidFill>
-              </a:rPr>
-              <a:t>- Dual-Token JWT auth, granular role-based access.</a:t>
-            </a:r>
-            <a:endParaRPr lang="en-US" sz="1800" dirty="0"/>
-          </a:p>
-        </p:txBody>
-      </p:sp>
-      <p:sp>
-        <p:nvSpPr>
-          <p:cNvPr id="7" name="Text 5"/>
-          <p:cNvSpPr/>
-          <p:nvPr/>
-        </p:nvSpPr>
-        <p:spPr>
-          <a:xfrm>
-            <a:off x="457200" y="3657600"/>
-            <a:ext cx="8229600" cy="0"/>
-          </a:xfrm>
-          <a:prstGeom prst="rect">
-            <a:avLst/>
-          </a:prstGeom>
-          <a:noFill/>
-          <a:ln/>
-        </p:spPr>
-        <p:txBody>
-          <a:bodyPr wrap="square" lIns="127000" tIns="127000" rIns="127000" bIns="127000" rtlCol="0" anchor="ctr"/>
-          <a:lstStyle/>
-          <a:p>
-            <a:pPr marL="342900" indent="-342900">
-              <a:buSzPct val="100000"/>
-              <a:buChar char="•"/>
-            </a:pPr>
-            <a:r>
-              <a:rPr lang="en-US" sz="1800" b="1" dirty="0">
-                <a:solidFill>
-                  <a:srgbClr val="333333"/>
-                </a:solidFill>
-              </a:rPr>
-              <a:t>Full Responsiveness </a:t>
-            </a:r>
-            <a:pPr indent="0" marL="0">
-              <a:buNone/>
-            </a:pPr>
-            <a:r>
-              <a:rPr lang="en-US" sz="1800" dirty="0">
-                <a:solidFill>
-                  <a:srgbClr val="333333"/>
-                </a:solidFill>
-              </a:rPr>
-              <a:t>- Seamless experience across all devices.</a:t>
-            </a:r>
-            <a:endParaRPr lang="en-US" sz="1800" dirty="0"/>
+              <a:rPr lang="en-US" sz="2000" b="1" dirty="0">
+                <a:solidFill>
+                  <a:srgbClr val="333333"/>
+                </a:solidFill>
+              </a:rPr>
+              <a:t>Core Philosophy:</a:t>
+            </a:r>
+            <a:pPr indent="0" marL="0">
+              <a:buNone/>
+            </a:pPr>
+            <a:r>
+              <a:rPr lang="en-US" sz="2000" dirty="0">
+                <a:solidFill>
+                  <a:srgbClr val="333333"/>
+                </a:solidFill>
+              </a:rPr>
+              <a:t> Lightning-fast performance, premium UI/UX, enterprise-grade security, and real-time updates.</a:t>
+            </a:r>
+            <a:endParaRPr lang="en-US" sz="2000" dirty="0"/>
           </a:p>
         </p:txBody>
       </p:sp>
@@ -2328,7 +3290,7 @@
                   <a:srgbClr val="0F172A"/>
                 </a:solidFill>
               </a:rPr>
-              <a:t>Core Features (1/2)</a:t>
+              <a:t>Literature Review</a:t>
             </a:r>
             <a:endParaRPr lang="en-US" sz="3600" dirty="0"/>
           </a:p>
@@ -2360,121 +3322,96 @@
               <a:buChar char="•"/>
             </a:pPr>
             <a:r>
-              <a:rPr lang="en-US" sz="2000" b="1" dirty="0">
-                <a:solidFill>
-                  <a:srgbClr val="333333"/>
-                </a:solidFill>
-              </a:rPr>
-              <a:t>Unified Authentication Suite: </a:t>
-            </a:r>
-            <a:pPr indent="0" marL="0">
-              <a:buNone/>
-            </a:pPr>
-            <a:r>
-              <a:rPr lang="en-US" sz="2000" dirty="0">
-                <a:solidFill>
-                  <a:srgbClr val="333333"/>
-                </a:solidFill>
-              </a:rPr>
-              <a:t>6 distinct roles, JWT dual-token, email verifications.</a:t>
-            </a:r>
-            <a:endParaRPr lang="en-US" sz="2000" dirty="0"/>
-          </a:p>
-        </p:txBody>
-      </p:sp>
-      <p:sp>
-        <p:nvSpPr>
-          <p:cNvPr id="4" name="Text 2"/>
-          <p:cNvSpPr/>
-          <p:nvPr/>
-        </p:nvSpPr>
-        <p:spPr>
-          <a:xfrm>
-            <a:off x="457200" y="2011680"/>
-            <a:ext cx="8229600" cy="0"/>
-          </a:xfrm>
-          <a:prstGeom prst="rect">
-            <a:avLst/>
-          </a:prstGeom>
-          <a:noFill/>
-          <a:ln/>
-        </p:spPr>
-        <p:txBody>
-          <a:bodyPr wrap="square" lIns="127000" tIns="127000" rIns="127000" bIns="127000" rtlCol="0" anchor="ctr"/>
-          <a:lstStyle/>
-          <a:p>
-            <a:pPr marL="342900" indent="-342900">
+              <a:rPr lang="en-US" sz="1800" dirty="0">
+                <a:solidFill>
+                  <a:srgbClr val="333333"/>
+                </a:solidFill>
+              </a:rPr>
+              <a:t>Traditional Academic Portals:</a:t>
+            </a:r>
+            <a:endParaRPr lang="en-US" sz="1800" dirty="0"/>
+          </a:p>
+          <a:p>
+            <a:pPr marL="254000" indent="-254000">
               <a:buSzPct val="100000"/>
               <a:buChar char="•"/>
             </a:pPr>
             <a:r>
-              <a:rPr lang="en-US" sz="2000" b="1" dirty="0">
-                <a:solidFill>
-                  <a:srgbClr val="333333"/>
-                </a:solidFill>
-              </a:rPr>
-              <a:t>Academic Lifecycle Management: </a:t>
-            </a:r>
-            <a:pPr indent="0" marL="0">
-              <a:buNone/>
-            </a:pPr>
-            <a:r>
-              <a:rPr lang="en-US" sz="2000" dirty="0">
-                <a:solidFill>
-                  <a:srgbClr val="333333"/>
-                </a:solidFill>
-              </a:rPr>
-              <a:t>Smart real-time attendance, Result processing engine, Dynamic curriculum.</a:t>
-            </a:r>
-            <a:endParaRPr lang="en-US" sz="2000" dirty="0"/>
-          </a:p>
-        </p:txBody>
-      </p:sp>
-      <p:sp>
-        <p:nvSpPr>
-          <p:cNvPr id="5" name="Text 3"/>
-          <p:cNvSpPr/>
-          <p:nvPr/>
-        </p:nvSpPr>
-        <p:spPr>
-          <a:xfrm>
-            <a:off x="457200" y="2834640"/>
-            <a:ext cx="8229600" cy="0"/>
-          </a:xfrm>
-          <a:prstGeom prst="rect">
-            <a:avLst/>
-          </a:prstGeom>
-          <a:noFill/>
-          <a:ln/>
-        </p:spPr>
-        <p:txBody>
-          <a:bodyPr wrap="square" lIns="127000" tIns="127000" rIns="127000" bIns="127000" rtlCol="0" anchor="ctr"/>
-          <a:lstStyle/>
-          <a:p>
-            <a:pPr marL="342900" indent="-342900">
+              <a:rPr lang="en-US" sz="1800" dirty="0">
+                <a:solidFill>
+                  <a:srgbClr val="333333"/>
+                </a:solidFill>
+              </a:rPr>
+              <a:t> Built on monolithic, legacy technologies from the early 2000s.</a:t>
+            </a:r>
+            <a:endParaRPr lang="en-US" sz="1800" dirty="0"/>
+          </a:p>
+          <a:p>
+            <a:pPr marL="254000" indent="-254000">
               <a:buSzPct val="100000"/>
               <a:buChar char="•"/>
             </a:pPr>
             <a:r>
-              <a:rPr lang="en-US" sz="2000" b="1" dirty="0">
-                <a:solidFill>
-                  <a:srgbClr val="333333"/>
-                </a:solidFill>
-              </a:rPr>
-              <a:t>Institutional Governance Terminal: </a:t>
-            </a:r>
-            <a:pPr indent="0" marL="0">
-              <a:buNone/>
-            </a:pPr>
-            <a:r>
-              <a:rPr lang="en-US" sz="2000" dirty="0">
-                <a:solidFill>
-                  <a:srgbClr val="333333"/>
-                </a:solidFill>
-              </a:rPr>
-              <a:t>Admit card system, Coordinator dashboard, Notice board, Policy engine.</a:t>
-            </a:r>
-            <a:endParaRPr lang="en-US" sz="2000" dirty="0"/>
+              <a:rPr lang="en-US" sz="1800" dirty="0">
+                <a:solidFill>
+                  <a:srgbClr val="333333"/>
+                </a:solidFill>
+              </a:rPr>
+              <a:t> Lack of mobile responsiveness, making access difficult on smartphones.</a:t>
+            </a:r>
+            <a:pPr indent="0" marL="0">
+              <a:buNone/>
+            </a:pPr>
+            <a:r>
+              <a:rPr lang="en-US" sz="1800" dirty="0">
+                <a:solidFill>
+                  <a:srgbClr val="333333"/>
+                </a:solidFill>
+              </a:rPr>
+              <a:t>Segregated Workflows:</a:t>
+            </a:r>
+            <a:endParaRPr lang="en-US" sz="1800" dirty="0"/>
+          </a:p>
+          <a:p>
+            <a:pPr marL="254000" indent="-254000">
+              <a:buSzPct val="100000"/>
+              <a:buChar char="•"/>
+            </a:pPr>
+            <a:r>
+              <a:rPr lang="en-US" sz="1800" dirty="0">
+                <a:solidFill>
+                  <a:srgbClr val="333333"/>
+                </a:solidFill>
+              </a:rPr>
+              <a:t> Attendance, grading, fees, and study materials are often scattered across disparate systems.</a:t>
+            </a:r>
+            <a:pPr indent="0" marL="0">
+              <a:buNone/>
+            </a:pPr>
+            <a:r>
+              <a:rPr lang="en-US" sz="1800" dirty="0">
+                <a:solidFill>
+                  <a:srgbClr val="333333"/>
+                </a:solidFill>
+              </a:rPr>
+              <a:t>Security and Real-time Processing:</a:t>
+            </a:r>
+            <a:endParaRPr lang="en-US" sz="1800" dirty="0"/>
+          </a:p>
+          <a:p>
+            <a:pPr marL="254000" indent="-254000">
+              <a:buSzPct val="100000"/>
+              <a:buChar char="•"/>
+            </a:pPr>
+            <a:r>
+              <a:rPr lang="en-US" sz="1800" dirty="0">
+                <a:solidFill>
+                  <a:srgbClr val="333333"/>
+                </a:solidFill>
+              </a:rPr>
+              <a:t> Outdated authentication mechanisms and batched updates leading to slow data propagation.</a:t>
+            </a:r>
+            <a:endParaRPr lang="en-US" sz="1800" dirty="0"/>
           </a:p>
         </p:txBody>
       </p:sp>
@@ -2533,7 +3470,7 @@
                   <a:srgbClr val="0F172A"/>
                 </a:solidFill>
               </a:rPr>
-              <a:t>Core Features (2/2)</a:t>
+              <a:t>Problem Statement</a:t>
             </a:r>
             <a:endParaRPr lang="en-US" sz="3600" dirty="0"/>
           </a:p>
@@ -2548,6 +3485,42 @@
         <p:spPr>
           <a:xfrm>
             <a:off x="457200" y="1371600"/>
+            <a:ext cx="8229600" cy="0"/>
+          </a:xfrm>
+          <a:prstGeom prst="rect">
+            <a:avLst/>
+          </a:prstGeom>
+          <a:noFill/>
+          <a:ln/>
+        </p:spPr>
+        <p:txBody>
+          <a:bodyPr wrap="square" rtlCol="0" anchor="ctr"/>
+          <a:lstStyle/>
+          <a:p>
+            <a:pPr indent="0" marL="0">
+              <a:buNone/>
+            </a:pPr>
+            <a:r>
+              <a:rPr lang="en-US" sz="2000" dirty="0">
+                <a:solidFill>
+                  <a:srgbClr val="333333"/>
+                </a:solidFill>
+              </a:rPr>
+              <a:t>Current university management systems face significant operational challenges:</a:t>
+            </a:r>
+            <a:endParaRPr lang="en-US" sz="2000" dirty="0"/>
+          </a:p>
+        </p:txBody>
+      </p:sp>
+      <p:sp>
+        <p:nvSpPr>
+          <p:cNvPr id="4" name="Text 2"/>
+          <p:cNvSpPr/>
+          <p:nvPr/>
+        </p:nvSpPr>
+        <p:spPr>
+          <a:xfrm>
+            <a:off x="457200" y="2011680"/>
             <a:ext cx="8229600" cy="0"/>
           </a:xfrm>
           <a:prstGeom prst="rect">
@@ -2565,37 +3538,37 @@
               <a:buChar char="•"/>
             </a:pPr>
             <a:r>
-              <a:rPr lang="en-US" sz="2000" b="1" dirty="0">
-                <a:solidFill>
-                  <a:srgbClr val="333333"/>
-                </a:solidFill>
-              </a:rPr>
-              <a:t>Financial Management System: </a:t>
-            </a:r>
-            <a:pPr indent="0" marL="0">
-              <a:buNone/>
-            </a:pPr>
-            <a:r>
-              <a:rPr lang="en-US" sz="2000" dirty="0">
-                <a:solidFill>
-                  <a:srgbClr val="333333"/>
-                </a:solidFill>
-              </a:rPr>
-              <a:t>Payment tracking, Advance payment rollover, Fee management.</a:t>
-            </a:r>
-            <a:endParaRPr lang="en-US" sz="2000" dirty="0"/>
-          </a:p>
-        </p:txBody>
-      </p:sp>
-      <p:sp>
-        <p:nvSpPr>
-          <p:cNvPr id="4" name="Text 2"/>
-          <p:cNvSpPr/>
-          <p:nvPr/>
-        </p:nvSpPr>
-        <p:spPr>
-          <a:xfrm>
-            <a:off x="457200" y="2194560"/>
+              <a:rPr lang="en-US" sz="1800" b="1" dirty="0">
+                <a:solidFill>
+                  <a:srgbClr val="333333"/>
+                </a:solidFill>
+              </a:rPr>
+              <a:t>User Experience: </a:t>
+            </a:r>
+            <a:pPr indent="0" marL="0">
+              <a:buNone/>
+            </a:pPr>
+            <a:r>
+              <a:rPr lang="en-US" sz="1800" dirty="0">
+                <a:solidFill>
+                  <a:srgbClr val="333333"/>
+                </a:solidFill>
+              </a:rPr>
+              <a:t>Slow, cluttered, and confusing interfaces that frustrate users.</a:t>
+            </a:r>
+            <a:endParaRPr lang="en-US" sz="1800" dirty="0"/>
+          </a:p>
+        </p:txBody>
+      </p:sp>
+      <p:sp>
+        <p:nvSpPr>
+          <p:cNvPr id="5" name="Text 3"/>
+          <p:cNvSpPr/>
+          <p:nvPr/>
+        </p:nvSpPr>
+        <p:spPr>
+          <a:xfrm>
+            <a:off x="457200" y="2560320"/>
             <a:ext cx="8229600" cy="0"/>
           </a:xfrm>
           <a:prstGeom prst="rect">
@@ -2613,37 +3586,37 @@
               <a:buChar char="•"/>
             </a:pPr>
             <a:r>
-              <a:rPr lang="en-US" sz="2000" b="1" dirty="0">
-                <a:solidFill>
-                  <a:srgbClr val="333333"/>
-                </a:solidFill>
-              </a:rPr>
-              <a:t>AI-Powered Assistant (Vapi AI): </a:t>
-            </a:r>
-            <a:pPr indent="0" marL="0">
-              <a:buNone/>
-            </a:pPr>
-            <a:r>
-              <a:rPr lang="en-US" sz="2000" dirty="0">
-                <a:solidFill>
-                  <a:srgbClr val="333333"/>
-                </a:solidFill>
-              </a:rPr>
-              <a:t>Smart voice &amp; text conversational interface.</a:t>
-            </a:r>
-            <a:endParaRPr lang="en-US" sz="2000" dirty="0"/>
-          </a:p>
-        </p:txBody>
-      </p:sp>
-      <p:sp>
-        <p:nvSpPr>
-          <p:cNvPr id="5" name="Text 3"/>
-          <p:cNvSpPr/>
-          <p:nvPr/>
-        </p:nvSpPr>
-        <p:spPr>
-          <a:xfrm>
-            <a:off x="457200" y="2834640"/>
+              <a:rPr lang="en-US" sz="1800" b="1" dirty="0">
+                <a:solidFill>
+                  <a:srgbClr val="333333"/>
+                </a:solidFill>
+              </a:rPr>
+              <a:t>Inefficiency: </a:t>
+            </a:r>
+            <a:pPr indent="0" marL="0">
+              <a:buNone/>
+            </a:pPr>
+            <a:r>
+              <a:rPr lang="en-US" sz="1800" dirty="0">
+                <a:solidFill>
+                  <a:srgbClr val="333333"/>
+                </a:solidFill>
+              </a:rPr>
+              <a:t>Manual processes for attendance marking, payment tracking, and admit card issuance.</a:t>
+            </a:r>
+            <a:endParaRPr lang="en-US" sz="1800" dirty="0"/>
+          </a:p>
+        </p:txBody>
+      </p:sp>
+      <p:sp>
+        <p:nvSpPr>
+          <p:cNvPr id="6" name="Text 4"/>
+          <p:cNvSpPr/>
+          <p:nvPr/>
+        </p:nvSpPr>
+        <p:spPr>
+          <a:xfrm>
+            <a:off x="457200" y="3108960"/>
             <a:ext cx="8229600" cy="0"/>
           </a:xfrm>
           <a:prstGeom prst="rect">
@@ -2661,25 +3634,73 @@
               <a:buChar char="•"/>
             </a:pPr>
             <a:r>
-              <a:rPr lang="en-US" sz="2000" b="1" dirty="0">
-                <a:solidFill>
-                  <a:srgbClr val="333333"/>
-                </a:solidFill>
-              </a:rPr>
-              <a:t>Real-Time Notification System: </a:t>
-            </a:r>
-            <a:pPr indent="0" marL="0">
-              <a:buNone/>
-            </a:pPr>
-            <a:r>
-              <a:rPr lang="en-US" sz="2000" dirty="0">
-                <a:solidFill>
-                  <a:srgbClr val="333333"/>
-                </a:solidFill>
-              </a:rPr>
-              <a:t>Socket.IO instant updates across modules.</a:t>
-            </a:r>
-            <a:endParaRPr lang="en-US" sz="2000" dirty="0"/>
+              <a:rPr lang="en-US" sz="1800" b="1" dirty="0">
+                <a:solidFill>
+                  <a:srgbClr val="333333"/>
+                </a:solidFill>
+              </a:rPr>
+              <a:t>Data Silos: </a:t>
+            </a:r>
+            <a:pPr indent="0" marL="0">
+              <a:buNone/>
+            </a:pPr>
+            <a:r>
+              <a:rPr lang="en-US" sz="1800" dirty="0">
+                <a:solidFill>
+                  <a:srgbClr val="333333"/>
+                </a:solidFill>
+              </a:rPr>
+              <a:t>No unified database, making comprehensive analytics and auditing impossible.</a:t>
+            </a:r>
+            <a:endParaRPr lang="en-US" sz="1800" dirty="0"/>
+          </a:p>
+        </p:txBody>
+      </p:sp>
+      <p:sp>
+        <p:nvSpPr>
+          <p:cNvPr id="7" name="Text 5"/>
+          <p:cNvSpPr/>
+          <p:nvPr/>
+        </p:nvSpPr>
+        <p:spPr>
+          <a:xfrm>
+            <a:off x="457200" y="3657600"/>
+            <a:ext cx="8229600" cy="0"/>
+          </a:xfrm>
+          <a:prstGeom prst="rect">
+            <a:avLst/>
+          </a:prstGeom>
+          <a:noFill/>
+          <a:ln/>
+        </p:spPr>
+        <p:txBody>
+          <a:bodyPr wrap="square" lIns="127000" tIns="127000" rIns="127000" bIns="127000" rtlCol="0" anchor="ctr"/>
+          <a:lstStyle/>
+          <a:p>
+            <a:pPr marL="342900" indent="-342900">
+              <a:buSzPct val="100000"/>
+              <a:buChar char="•"/>
+            </a:pPr>
+            <a:r>
+              <a:rPr lang="en-US" sz="1800" b="1" dirty="0">
+                <a:solidFill>
+                  <a:srgbClr val="333333"/>
+                </a:solidFill>
+              </a:rPr>
+              <a:t>Communication Gaps: </a:t>
+            </a:r>
+            <a:pPr indent="0" marL="0">
+              <a:buNone/>
+            </a:pPr>
+            <a:r>
+              <a:rPr lang="en-US" sz="1800" dirty="0">
+                <a:solidFill>
+                  <a:srgbClr val="333333"/>
+                </a:solidFill>
+              </a:rPr>
+              <a:t>Lack of real-time notifications for important academic events and financial updates.</a:t>
+            </a:r>
+            <a:endParaRPr lang="en-US" sz="1800" dirty="0"/>
           </a:p>
         </p:txBody>
       </p:sp>
@@ -2738,7 +3759,7 @@
                   <a:srgbClr val="0F172A"/>
                 </a:solidFill>
               </a:rPr>
-              <a:t>Role-Based Capabilities</a:t>
+              <a:t>Objectives</a:t>
             </a:r>
             <a:endParaRPr lang="en-US" sz="3600" dirty="0"/>
           </a:p>
@@ -2762,7 +3783,7 @@
           <a:ln/>
         </p:spPr>
         <p:txBody>
-          <a:bodyPr wrap="square" lIns="63500" tIns="63500" rIns="63500" bIns="63500" rtlCol="0" anchor="ctr"/>
+          <a:bodyPr wrap="square" lIns="127000" tIns="127000" rIns="127000" bIns="127000" rtlCol="0" anchor="ctr"/>
           <a:lstStyle/>
           <a:p>
             <a:pPr marL="342900" indent="-342900">
@@ -2775,7 +3796,7 @@
                   <a:srgbClr val="333333"/>
                 </a:solidFill>
               </a:rPr>
-              <a:t>Students: </a:t>
+              <a:t>Operational Excellence:</a:t>
             </a:r>
             <a:pPr indent="0" marL="0">
               <a:buNone/>
@@ -2786,7 +3807,7 @@
                   <a:srgbClr val="333333"/>
                 </a:solidFill>
               </a:rPr>
-              <a:t>Access attendance, results, fees, materials, notices.</a:t>
+              <a:t> Reduce administrative overhead by 60% and automate core academic processes.</a:t>
             </a:r>
             <a:endParaRPr lang="en-US" sz="1800" dirty="0"/>
           </a:p>
@@ -2800,17 +3821,17 @@
         </p:nvSpPr>
         <p:spPr>
           <a:xfrm>
-            <a:off x="457200" y="1920240"/>
-            <a:ext cx="8229600" cy="0"/>
-          </a:xfrm>
-          <a:prstGeom prst="rect">
-            <a:avLst/>
-          </a:prstGeom>
-          <a:noFill/>
-          <a:ln/>
-        </p:spPr>
-        <p:txBody>
-          <a:bodyPr wrap="square" lIns="63500" tIns="63500" rIns="63500" bIns="63500" rtlCol="0" anchor="ctr"/>
+            <a:off x="457200" y="2011680"/>
+            <a:ext cx="8229600" cy="0"/>
+          </a:xfrm>
+          <a:prstGeom prst="rect">
+            <a:avLst/>
+          </a:prstGeom>
+          <a:noFill/>
+          <a:ln/>
+        </p:spPr>
+        <p:txBody>
+          <a:bodyPr wrap="square" lIns="127000" tIns="127000" rIns="127000" bIns="127000" rtlCol="0" anchor="ctr"/>
           <a:lstStyle/>
           <a:p>
             <a:pPr marL="342900" indent="-342900">
@@ -2823,7 +3844,7 @@
                   <a:srgbClr val="333333"/>
                 </a:solidFill>
               </a:rPr>
-              <a:t>Teachers: </a:t>
+              <a:t>Enhanced User Experience:</a:t>
             </a:r>
             <a:pPr indent="0" marL="0">
               <a:buNone/>
@@ -2834,7 +3855,7 @@
                   <a:srgbClr val="333333"/>
                 </a:solidFill>
               </a:rPr>
-              <a:t>Mark attendance, upload results &amp; materials, grade assignments.</a:t>
+              <a:t> Deliver a mobile-first, intuitive interface with &lt;2s page transitions.</a:t>
             </a:r>
             <a:endParaRPr lang="en-US" sz="1800" dirty="0"/>
           </a:p>
@@ -2848,17 +3869,17 @@
         </p:nvSpPr>
         <p:spPr>
           <a:xfrm>
-            <a:off x="457200" y="2468880"/>
-            <a:ext cx="8229600" cy="0"/>
-          </a:xfrm>
-          <a:prstGeom prst="rect">
-            <a:avLst/>
-          </a:prstGeom>
-          <a:noFill/>
-          <a:ln/>
-        </p:spPr>
-        <p:txBody>
-          <a:bodyPr wrap="square" lIns="63500" tIns="63500" rIns="63500" bIns="63500" rtlCol="0" anchor="ctr"/>
+            <a:off x="457200" y="2651760"/>
+            <a:ext cx="8229600" cy="0"/>
+          </a:xfrm>
+          <a:prstGeom prst="rect">
+            <a:avLst/>
+          </a:prstGeom>
+          <a:noFill/>
+          <a:ln/>
+        </p:spPr>
+        <p:txBody>
+          <a:bodyPr wrap="square" lIns="127000" tIns="127000" rIns="127000" bIns="127000" rtlCol="0" anchor="ctr"/>
           <a:lstStyle/>
           <a:p>
             <a:pPr marL="342900" indent="-342900">
@@ -2871,7 +3892,7 @@
                   <a:srgbClr val="333333"/>
                 </a:solidFill>
               </a:rPr>
-              <a:t>Coordinators: </a:t>
+              <a:t>Unified Governance:</a:t>
             </a:r>
             <a:pPr indent="0" marL="0">
               <a:buNone/>
@@ -2882,7 +3903,7 @@
                   <a:srgbClr val="333333"/>
                 </a:solidFill>
               </a:rPr>
-              <a:t>Assign courses, manage schedule, publish notices.</a:t>
+              <a:t> Consolidate attendance, results, materials, scheduling, and finance into one platform.</a:t>
             </a:r>
             <a:endParaRPr lang="en-US" sz="1800" dirty="0"/>
           </a:p>
@@ -2896,17 +3917,17 @@
         </p:nvSpPr>
         <p:spPr>
           <a:xfrm>
-            <a:off x="457200" y="3017520"/>
-            <a:ext cx="8229600" cy="0"/>
-          </a:xfrm>
-          <a:prstGeom prst="rect">
-            <a:avLst/>
-          </a:prstGeom>
-          <a:noFill/>
-          <a:ln/>
-        </p:spPr>
-        <p:txBody>
-          <a:bodyPr wrap="square" lIns="63500" tIns="63500" rIns="63500" bIns="63500" rtlCol="0" anchor="ctr"/>
+            <a:off x="457200" y="3291840"/>
+            <a:ext cx="8229600" cy="0"/>
+          </a:xfrm>
+          <a:prstGeom prst="rect">
+            <a:avLst/>
+          </a:prstGeom>
+          <a:noFill/>
+          <a:ln/>
+        </p:spPr>
+        <p:txBody>
+          <a:bodyPr wrap="square" lIns="127000" tIns="127000" rIns="127000" bIns="127000" rtlCol="0" anchor="ctr"/>
           <a:lstStyle/>
           <a:p>
             <a:pPr marL="342900" indent="-342900">
@@ -2919,7 +3940,7 @@
                   <a:srgbClr val="333333"/>
                 </a:solidFill>
               </a:rPr>
-              <a:t>Dept Heads: </a:t>
+              <a:t>Robust Security &amp; Scalability:</a:t>
             </a:r>
             <a:pPr indent="0" marL="0">
               <a:buNone/>
@@ -2930,55 +3951,7 @@
                   <a:srgbClr val="333333"/>
                 </a:solidFill>
               </a:rPr>
-              <a:t>Approve admit cards, manage policies, view analytics.</a:t>
-            </a:r>
-            <a:endParaRPr lang="en-US" sz="1800" dirty="0"/>
-          </a:p>
-        </p:txBody>
-      </p:sp>
-      <p:sp>
-        <p:nvSpPr>
-          <p:cNvPr id="7" name="Text 5"/>
-          <p:cNvSpPr/>
-          <p:nvPr/>
-        </p:nvSpPr>
-        <p:spPr>
-          <a:xfrm>
-            <a:off x="457200" y="3566160"/>
-            <a:ext cx="8229600" cy="0"/>
-          </a:xfrm>
-          <a:prstGeom prst="rect">
-            <a:avLst/>
-          </a:prstGeom>
-          <a:noFill/>
-          <a:ln/>
-        </p:spPr>
-        <p:txBody>
-          <a:bodyPr wrap="square" lIns="63500" tIns="63500" rIns="63500" bIns="63500" rtlCol="0" anchor="ctr"/>
-          <a:lstStyle/>
-          <a:p>
-            <a:pPr marL="342900" indent="-342900">
-              <a:buSzPct val="100000"/>
-              <a:buChar char="•"/>
-            </a:pPr>
-            <a:r>
-              <a:rPr lang="en-US" sz="1800" b="1" dirty="0">
-                <a:solidFill>
-                  <a:srgbClr val="333333"/>
-                </a:solidFill>
-              </a:rPr>
-              <a:t>Finance / Admins: </a:t>
-            </a:r>
-            <a:pPr indent="0" marL="0">
-              <a:buNone/>
-            </a:pPr>
-            <a:r>
-              <a:rPr lang="en-US" sz="1800" dirty="0">
-                <a:solidFill>
-                  <a:srgbClr val="333333"/>
-                </a:solidFill>
-              </a:rPr>
-              <a:t>Track payments, manage treasury, full system control.</a:t>
+              <a:t> Implement dual-token JWT authentication and cloud-ready infrastructure for 50,000+ users.</a:t>
             </a:r>
             <a:endParaRPr lang="en-US" sz="1800" dirty="0"/>
           </a:p>
@@ -3039,7 +4012,7 @@
                   <a:srgbClr val="0F172A"/>
                 </a:solidFill>
               </a:rPr>
-              <a:t>Tech Stack</a:t>
+              <a:t>Methodology</a:t>
             </a:r>
             <a:endParaRPr lang="en-US" sz="3600" dirty="0"/>
           </a:p>
@@ -3053,8 +4026,8 @@
         </p:nvSpPr>
         <p:spPr>
           <a:xfrm>
-            <a:off x="457200" y="1371600"/>
-            <a:ext cx="3657600" cy="0"/>
+            <a:off x="457200" y="1097280"/>
+            <a:ext cx="8229600" cy="0"/>
           </a:xfrm>
           <a:prstGeom prst="rect">
             <a:avLst/>
@@ -3075,7 +4048,7 @@
                   <a:srgbClr val="0369A1"/>
                 </a:solidFill>
               </a:rPr>
-              <a:t>Frontend:</a:t>
+              <a:t>System Architecture &amp; Tech Stack:</a:t>
             </a:r>
             <a:endParaRPr lang="en-US" sz="2000" dirty="0"/>
           </a:p>
@@ -3089,17 +4062,17 @@
         </p:nvSpPr>
         <p:spPr>
           <a:xfrm>
-            <a:off x="457200" y="1828800"/>
-            <a:ext cx="3657600" cy="0"/>
-          </a:xfrm>
-          <a:prstGeom prst="rect">
-            <a:avLst/>
-          </a:prstGeom>
-          <a:noFill/>
-          <a:ln/>
-        </p:spPr>
-        <p:txBody>
-          <a:bodyPr wrap="square" rtlCol="0" anchor="ctr"/>
+            <a:off x="457200" y="1645920"/>
+            <a:ext cx="8229600" cy="0"/>
+          </a:xfrm>
+          <a:prstGeom prst="rect">
+            <a:avLst/>
+          </a:prstGeom>
+          <a:noFill/>
+          <a:ln/>
+        </p:spPr>
+        <p:txBody>
+          <a:bodyPr wrap="square" lIns="127000" tIns="127000" rIns="127000" bIns="127000" rtlCol="0" anchor="ctr"/>
           <a:lstStyle/>
           <a:p>
             <a:pPr marL="342900" indent="-342900">
@@ -3107,205 +4080,215 @@
               <a:buChar char="•"/>
             </a:pPr>
             <a:r>
+              <a:rPr lang="en-US" sz="1600" b="1" dirty="0">
+                <a:solidFill>
+                  <a:srgbClr val="333333"/>
+                </a:solidFill>
+              </a:rPr>
+              <a:t>Frontend:</a:t>
+            </a:r>
+            <a:pPr indent="0" marL="0">
+              <a:buNone/>
+            </a:pPr>
+            <a:r>
               <a:rPr lang="en-US" sz="1600" dirty="0">
                 <a:solidFill>
                   <a:srgbClr val="333333"/>
                 </a:solidFill>
               </a:rPr>
-              <a:t>Vite, Vanilla JS</a:t>
+              <a:t> Vite, Vanilla JS, Tailwind CSS, GSAP, and Three.js for modular shell rendering and animations.</a:t>
             </a:r>
             <a:endParaRPr lang="en-US" sz="1600" dirty="0"/>
           </a:p>
+        </p:txBody>
+      </p:sp>
+      <p:sp>
+        <p:nvSpPr>
+          <p:cNvPr id="5" name="Text 3"/>
+          <p:cNvSpPr/>
+          <p:nvPr/>
+        </p:nvSpPr>
+        <p:spPr>
+          <a:xfrm>
+            <a:off x="457200" y="2194560"/>
+            <a:ext cx="8229600" cy="0"/>
+          </a:xfrm>
+          <a:prstGeom prst="rect">
+            <a:avLst/>
+          </a:prstGeom>
+          <a:noFill/>
+          <a:ln/>
+        </p:spPr>
+        <p:txBody>
+          <a:bodyPr wrap="square" lIns="127000" tIns="127000" rIns="127000" bIns="127000" rtlCol="0" anchor="ctr"/>
+          <a:lstStyle/>
           <a:p>
             <a:pPr marL="342900" indent="-342900">
               <a:buSzPct val="100000"/>
               <a:buChar char="•"/>
             </a:pPr>
             <a:r>
+              <a:rPr lang="en-US" sz="1600" b="1" dirty="0">
+                <a:solidFill>
+                  <a:srgbClr val="333333"/>
+                </a:solidFill>
+              </a:rPr>
+              <a:t>Backend:</a:t>
+            </a:r>
+            <a:pPr indent="0" marL="0">
+              <a:buNone/>
+            </a:pPr>
+            <a:r>
               <a:rPr lang="en-US" sz="1600" dirty="0">
                 <a:solidFill>
                   <a:srgbClr val="333333"/>
                 </a:solidFill>
               </a:rPr>
-              <a:t>Tailwind CSS</a:t>
+              <a:t> Node.js with Express.js RESTful API, adhering to MVC architecture.</a:t>
             </a:r>
             <a:endParaRPr lang="en-US" sz="1600" dirty="0"/>
           </a:p>
+        </p:txBody>
+      </p:sp>
+      <p:sp>
+        <p:nvSpPr>
+          <p:cNvPr id="6" name="Text 4"/>
+          <p:cNvSpPr/>
+          <p:nvPr/>
+        </p:nvSpPr>
+        <p:spPr>
+          <a:xfrm>
+            <a:off x="457200" y="2743200"/>
+            <a:ext cx="8229600" cy="0"/>
+          </a:xfrm>
+          <a:prstGeom prst="rect">
+            <a:avLst/>
+          </a:prstGeom>
+          <a:noFill/>
+          <a:ln/>
+        </p:spPr>
+        <p:txBody>
+          <a:bodyPr wrap="square" lIns="127000" tIns="127000" rIns="127000" bIns="127000" rtlCol="0" anchor="ctr"/>
+          <a:lstStyle/>
           <a:p>
             <a:pPr marL="342900" indent="-342900">
               <a:buSzPct val="100000"/>
               <a:buChar char="•"/>
             </a:pPr>
             <a:r>
+              <a:rPr lang="en-US" sz="1600" b="1" dirty="0">
+                <a:solidFill>
+                  <a:srgbClr val="333333"/>
+                </a:solidFill>
+              </a:rPr>
+              <a:t>Database:</a:t>
+            </a:r>
+            <a:pPr indent="0" marL="0">
+              <a:buNone/>
+            </a:pPr>
+            <a:r>
               <a:rPr lang="en-US" sz="1600" dirty="0">
                 <a:solidFill>
                   <a:srgbClr val="333333"/>
                 </a:solidFill>
               </a:rPr>
-              <a:t>GSAP, Three.js</a:t>
+              <a:t> PostgreSQL with Drizzle ORM for type-safe schema and scalable data storage.</a:t>
             </a:r>
             <a:endParaRPr lang="en-US" sz="1600" dirty="0"/>
           </a:p>
+        </p:txBody>
+      </p:sp>
+      <p:sp>
+        <p:nvSpPr>
+          <p:cNvPr id="7" name="Text 5"/>
+          <p:cNvSpPr/>
+          <p:nvPr/>
+        </p:nvSpPr>
+        <p:spPr>
+          <a:xfrm>
+            <a:off x="457200" y="3291840"/>
+            <a:ext cx="8229600" cy="0"/>
+          </a:xfrm>
+          <a:prstGeom prst="rect">
+            <a:avLst/>
+          </a:prstGeom>
+          <a:noFill/>
+          <a:ln/>
+        </p:spPr>
+        <p:txBody>
+          <a:bodyPr wrap="square" lIns="127000" tIns="127000" rIns="127000" bIns="127000" rtlCol="0" anchor="ctr"/>
+          <a:lstStyle/>
           <a:p>
             <a:pPr marL="342900" indent="-342900">
               <a:buSzPct val="100000"/>
               <a:buChar char="•"/>
             </a:pPr>
             <a:r>
+              <a:rPr lang="en-US" sz="1600" b="1" dirty="0">
+                <a:solidFill>
+                  <a:srgbClr val="333333"/>
+                </a:solidFill>
+              </a:rPr>
+              <a:t>Real-Time &amp; Integration:</a:t>
+            </a:r>
+            <a:pPr indent="0" marL="0">
+              <a:buNone/>
+            </a:pPr>
+            <a:r>
               <a:rPr lang="en-US" sz="1600" dirty="0">
                 <a:solidFill>
                   <a:srgbClr val="333333"/>
                 </a:solidFill>
               </a:rPr>
-              <a:t>Socket.IO Client</a:t>
+              <a:t> Socket.IO for live events, Cloudinary for media, and Nodemailer for email services.</a:t>
             </a:r>
             <a:endParaRPr lang="en-US" sz="1600" dirty="0"/>
           </a:p>
+        </p:txBody>
+      </p:sp>
+      <p:sp>
+        <p:nvSpPr>
+          <p:cNvPr id="8" name="Text 6"/>
+          <p:cNvSpPr/>
+          <p:nvPr/>
+        </p:nvSpPr>
+        <p:spPr>
+          <a:xfrm>
+            <a:off x="457200" y="3840480"/>
+            <a:ext cx="8229600" cy="0"/>
+          </a:xfrm>
+          <a:prstGeom prst="rect">
+            <a:avLst/>
+          </a:prstGeom>
+          <a:noFill/>
+          <a:ln/>
+        </p:spPr>
+        <p:txBody>
+          <a:bodyPr wrap="square" lIns="127000" tIns="127000" rIns="127000" bIns="127000" rtlCol="0" anchor="ctr"/>
+          <a:lstStyle/>
           <a:p>
             <a:pPr marL="342900" indent="-342900">
               <a:buSzPct val="100000"/>
               <a:buChar char="•"/>
             </a:pPr>
             <a:r>
+              <a:rPr lang="en-US" sz="1600" b="1" dirty="0">
+                <a:solidFill>
+                  <a:srgbClr val="333333"/>
+                </a:solidFill>
+              </a:rPr>
+              <a:t>Development Process:</a:t>
+            </a:r>
+            <a:pPr indent="0" marL="0">
+              <a:buNone/>
+            </a:pPr>
+            <a:r>
               <a:rPr lang="en-US" sz="1600" dirty="0">
                 <a:solidFill>
                   <a:srgbClr val="333333"/>
                 </a:solidFill>
               </a:rPr>
-              <a:t>Axios</a:t>
-            </a:r>
-            <a:endParaRPr lang="en-US" sz="1600" dirty="0"/>
-          </a:p>
-        </p:txBody>
-      </p:sp>
-      <p:sp>
-        <p:nvSpPr>
-          <p:cNvPr id="5" name="Text 3"/>
-          <p:cNvSpPr/>
-          <p:nvPr/>
-        </p:nvSpPr>
-        <p:spPr>
-          <a:xfrm>
-            <a:off x="4572000" y="1371600"/>
-            <a:ext cx="3657600" cy="0"/>
-          </a:xfrm>
-          <a:prstGeom prst="rect">
-            <a:avLst/>
-          </a:prstGeom>
-          <a:noFill/>
-          <a:ln/>
-        </p:spPr>
-        <p:txBody>
-          <a:bodyPr wrap="square" rtlCol="0" anchor="ctr"/>
-          <a:lstStyle/>
-          <a:p>
-            <a:pPr indent="0" marL="0">
-              <a:buNone/>
-            </a:pPr>
-            <a:r>
-              <a:rPr lang="en-US" sz="2000" b="1" dirty="0">
-                <a:solidFill>
-                  <a:srgbClr val="0369A1"/>
-                </a:solidFill>
-              </a:rPr>
-              <a:t>Backend:</a:t>
-            </a:r>
-            <a:endParaRPr lang="en-US" sz="2000" dirty="0"/>
-          </a:p>
-        </p:txBody>
-      </p:sp>
-      <p:sp>
-        <p:nvSpPr>
-          <p:cNvPr id="6" name="Text 4"/>
-          <p:cNvSpPr/>
-          <p:nvPr/>
-        </p:nvSpPr>
-        <p:spPr>
-          <a:xfrm>
-            <a:off x="4572000" y="1828800"/>
-            <a:ext cx="3657600" cy="0"/>
-          </a:xfrm>
-          <a:prstGeom prst="rect">
-            <a:avLst/>
-          </a:prstGeom>
-          <a:noFill/>
-          <a:ln/>
-        </p:spPr>
-        <p:txBody>
-          <a:bodyPr wrap="square" rtlCol="0" anchor="ctr"/>
-          <a:lstStyle/>
-          <a:p>
-            <a:pPr marL="342900" indent="-342900">
-              <a:buSzPct val="100000"/>
-              <a:buChar char="•"/>
-            </a:pPr>
-            <a:r>
-              <a:rPr lang="en-US" sz="1600" dirty="0">
-                <a:solidFill>
-                  <a:srgbClr val="333333"/>
-                </a:solidFill>
-              </a:rPr>
-              <a:t>Node.js, Express.js</a:t>
-            </a:r>
-            <a:endParaRPr lang="en-US" sz="1600" dirty="0"/>
-          </a:p>
-          <a:p>
-            <a:pPr marL="342900" indent="-342900">
-              <a:buSzPct val="100000"/>
-              <a:buChar char="•"/>
-            </a:pPr>
-            <a:r>
-              <a:rPr lang="en-US" sz="1600" dirty="0">
-                <a:solidFill>
-                  <a:srgbClr val="333333"/>
-                </a:solidFill>
-              </a:rPr>
-              <a:t>PostgreSQL</a:t>
-            </a:r>
-            <a:endParaRPr lang="en-US" sz="1600" dirty="0"/>
-          </a:p>
-          <a:p>
-            <a:pPr marL="342900" indent="-342900">
-              <a:buSzPct val="100000"/>
-              <a:buChar char="•"/>
-            </a:pPr>
-            <a:r>
-              <a:rPr lang="en-US" sz="1600" dirty="0">
-                <a:solidFill>
-                  <a:srgbClr val="333333"/>
-                </a:solidFill>
-              </a:rPr>
-              <a:t>Drizzle ORM</a:t>
-            </a:r>
-            <a:endParaRPr lang="en-US" sz="1600" dirty="0"/>
-          </a:p>
-          <a:p>
-            <a:pPr marL="342900" indent="-342900">
-              <a:buSzPct val="100000"/>
-              <a:buChar char="•"/>
-            </a:pPr>
-            <a:r>
-              <a:rPr lang="en-US" sz="1600" dirty="0">
-                <a:solidFill>
-                  <a:srgbClr val="333333"/>
-                </a:solidFill>
-              </a:rPr>
-              <a:t>JWT &amp; Bcrypt</a:t>
-            </a:r>
-            <a:endParaRPr lang="en-US" sz="1600" dirty="0"/>
-          </a:p>
-          <a:p>
-            <a:pPr marL="342900" indent="-342900">
-              <a:buSzPct val="100000"/>
-              <a:buChar char="•"/>
-            </a:pPr>
-            <a:r>
-              <a:rPr lang="en-US" sz="1600" dirty="0">
-                <a:solidFill>
-                  <a:srgbClr val="333333"/>
-                </a:solidFill>
-              </a:rPr>
-              <a:t>Socket.IO, Cloudinary</a:t>
+              <a:t> Phased agile approach (Foundation -&gt; Academic Core -&gt; Institutional Features -&gt; Finance).</a:t>
             </a:r>
             <a:endParaRPr lang="en-US" sz="1600" dirty="0"/>
           </a:p>
@@ -3366,7 +4349,7 @@
                   <a:srgbClr val="0F172A"/>
                 </a:solidFill>
               </a:rPr>
-              <a:t>Key Benefits</a:t>
+              <a:t>Result</a:t>
             </a:r>
             <a:endParaRPr lang="en-US" sz="3600" dirty="0"/>
           </a:p>
@@ -3380,7 +4363,7 @@
         </p:nvSpPr>
         <p:spPr>
           <a:xfrm>
-            <a:off x="457200" y="1371600"/>
+            <a:off x="457200" y="1188720"/>
             <a:ext cx="8229600" cy="0"/>
           </a:xfrm>
           <a:prstGeom prst="rect">
@@ -3391,6 +4374,42 @@
         </p:spPr>
         <p:txBody>
           <a:bodyPr wrap="square" rtlCol="0" anchor="ctr"/>
+          <a:lstStyle/>
+          <a:p>
+            <a:pPr indent="0" marL="0">
+              <a:buNone/>
+            </a:pPr>
+            <a:r>
+              <a:rPr lang="en-US" sz="2200" b="1" dirty="0">
+                <a:solidFill>
+                  <a:srgbClr val="0369A1"/>
+                </a:solidFill>
+              </a:rPr>
+              <a:t>A Fully Integrated Academic Platform</a:t>
+            </a:r>
+            <a:endParaRPr lang="en-US" sz="2200" dirty="0"/>
+          </a:p>
+        </p:txBody>
+      </p:sp>
+      <p:sp>
+        <p:nvSpPr>
+          <p:cNvPr id="4" name="Text 2"/>
+          <p:cNvSpPr/>
+          <p:nvPr/>
+        </p:nvSpPr>
+        <p:spPr>
+          <a:xfrm>
+            <a:off x="457200" y="1737360"/>
+            <a:ext cx="8229600" cy="0"/>
+          </a:xfrm>
+          <a:prstGeom prst="rect">
+            <a:avLst/>
+          </a:prstGeom>
+          <a:noFill/>
+          <a:ln/>
+        </p:spPr>
+        <p:txBody>
+          <a:bodyPr wrap="square" lIns="127000" tIns="127000" rIns="127000" bIns="127000" rtlCol="0" anchor="ctr"/>
           <a:lstStyle/>
           <a:p>
             <a:pPr marL="342900" indent="-342900">
@@ -3398,50 +4417,25 @@
               <a:buChar char="•"/>
             </a:pPr>
             <a:r>
-              <a:rPr lang="en-US" sz="2000" b="1" dirty="0">
-                <a:solidFill>
-                  <a:srgbClr val="333333"/>
-                </a:solidFill>
-              </a:rPr>
-              <a:t>Operational Excellence</a:t>
-            </a:r>
-            <a:endParaRPr lang="en-US" sz="2000" dirty="0"/>
-          </a:p>
-        </p:txBody>
-      </p:sp>
-      <p:sp>
-        <p:nvSpPr>
-          <p:cNvPr id="4" name="Text 2"/>
-          <p:cNvSpPr/>
-          <p:nvPr/>
-        </p:nvSpPr>
-        <p:spPr>
-          <a:xfrm>
-            <a:off x="914400" y="1737360"/>
-            <a:ext cx="7315200" cy="0"/>
-          </a:xfrm>
-          <a:prstGeom prst="rect">
-            <a:avLst/>
-          </a:prstGeom>
-          <a:noFill/>
-          <a:ln/>
-        </p:spPr>
-        <p:txBody>
-          <a:bodyPr wrap="square" rtlCol="0" anchor="ctr"/>
-          <a:lstStyle/>
-          <a:p>
-            <a:pPr indent="0" marL="0">
-              <a:buNone/>
-            </a:pPr>
-            <a:r>
-              <a:rPr lang="en-US" sz="1600" dirty="0">
-                <a:solidFill>
-                  <a:srgbClr val="555555"/>
-                </a:solidFill>
-              </a:rPr>
-              <a:t>Reduce admin overhead by 60%, automate manual processes.</a:t>
-            </a:r>
-            <a:endParaRPr lang="en-US" sz="1600" dirty="0"/>
+              <a:rPr lang="en-US" sz="1800" b="1" dirty="0">
+                <a:solidFill>
+                  <a:srgbClr val="333333"/>
+                </a:solidFill>
+              </a:rPr>
+              <a:t>Role-Based Dashboards: </a:t>
+            </a:r>
+            <a:pPr indent="0" marL="0">
+              <a:buNone/>
+            </a:pPr>
+            <a:r>
+              <a:rPr lang="en-US" sz="1800" dirty="0">
+                <a:solidFill>
+                  <a:srgbClr val="333333"/>
+                </a:solidFill>
+              </a:rPr>
+              <a:t>Tailored interfaces for Students, Teachers, and Administrators.</a:t>
+            </a:r>
+            <a:endParaRPr lang="en-US" sz="1800" dirty="0"/>
           </a:p>
         </p:txBody>
       </p:sp>
@@ -3463,7 +4457,7 @@
           <a:ln/>
         </p:spPr>
         <p:txBody>
-          <a:bodyPr wrap="square" rtlCol="0" anchor="ctr"/>
+          <a:bodyPr wrap="square" lIns="127000" tIns="127000" rIns="127000" bIns="127000" rtlCol="0" anchor="ctr"/>
           <a:lstStyle/>
           <a:p>
             <a:pPr marL="342900" indent="-342900">
@@ -3471,14 +4465,25 @@
               <a:buChar char="•"/>
             </a:pPr>
             <a:r>
-              <a:rPr lang="en-US" sz="2000" b="1" dirty="0">
-                <a:solidFill>
-                  <a:srgbClr val="333333"/>
-                </a:solidFill>
-              </a:rPr>
-              <a:t>User Experience</a:t>
-            </a:r>
-            <a:endParaRPr lang="en-US" sz="2000" dirty="0"/>
+              <a:rPr lang="en-US" sz="1800" b="1" dirty="0">
+                <a:solidFill>
+                  <a:srgbClr val="333333"/>
+                </a:solidFill>
+              </a:rPr>
+              <a:t>Smart Automation: </a:t>
+            </a:r>
+            <a:pPr indent="0" marL="0">
+              <a:buNone/>
+            </a:pPr>
+            <a:r>
+              <a:rPr lang="en-US" sz="1800" dirty="0">
+                <a:solidFill>
+                  <a:srgbClr val="333333"/>
+                </a:solidFill>
+              </a:rPr>
+              <a:t>Automated attendance tracking, result processing, and admit card generation.</a:t>
+            </a:r>
+            <a:endParaRPr lang="en-US" sz="1800" dirty="0"/>
           </a:p>
         </p:txBody>
       </p:sp>
@@ -3490,53 +4495,17 @@
         </p:nvSpPr>
         <p:spPr>
           <a:xfrm>
-            <a:off x="914400" y="2651760"/>
-            <a:ext cx="7315200" cy="0"/>
-          </a:xfrm>
-          <a:prstGeom prst="rect">
-            <a:avLst/>
-          </a:prstGeom>
-          <a:noFill/>
-          <a:ln/>
-        </p:spPr>
-        <p:txBody>
-          <a:bodyPr wrap="square" rtlCol="0" anchor="ctr"/>
-          <a:lstStyle/>
-          <a:p>
-            <a:pPr indent="0" marL="0">
-              <a:buNone/>
-            </a:pPr>
-            <a:r>
-              <a:rPr lang="en-US" sz="1600" dirty="0">
-                <a:solidFill>
-                  <a:srgbClr val="555555"/>
-                </a:solidFill>
-              </a:rPr>
-              <a:t>Intuitive, mobile-first interface with &lt;2s page transitions.</a:t>
-            </a:r>
-            <a:endParaRPr lang="en-US" sz="1600" dirty="0"/>
-          </a:p>
-        </p:txBody>
-      </p:sp>
-      <p:sp>
-        <p:nvSpPr>
-          <p:cNvPr id="7" name="Text 5"/>
-          <p:cNvSpPr/>
-          <p:nvPr/>
-        </p:nvSpPr>
-        <p:spPr>
-          <a:xfrm>
-            <a:off x="457200" y="3200400"/>
-            <a:ext cx="8229600" cy="0"/>
-          </a:xfrm>
-          <a:prstGeom prst="rect">
-            <a:avLst/>
-          </a:prstGeom>
-          <a:noFill/>
-          <a:ln/>
-        </p:spPr>
-        <p:txBody>
-          <a:bodyPr wrap="square" rtlCol="0" anchor="ctr"/>
+            <a:off x="457200" y="2834640"/>
+            <a:ext cx="8229600" cy="0"/>
+          </a:xfrm>
+          <a:prstGeom prst="rect">
+            <a:avLst/>
+          </a:prstGeom>
+          <a:noFill/>
+          <a:ln/>
+        </p:spPr>
+        <p:txBody>
+          <a:bodyPr wrap="square" lIns="127000" tIns="127000" rIns="127000" bIns="127000" rtlCol="0" anchor="ctr"/>
           <a:lstStyle/>
           <a:p>
             <a:pPr marL="342900" indent="-342900">
@@ -3544,50 +4513,73 @@
               <a:buChar char="•"/>
             </a:pPr>
             <a:r>
-              <a:rPr lang="en-US" sz="2000" b="1" dirty="0">
-                <a:solidFill>
-                  <a:srgbClr val="333333"/>
-                </a:solidFill>
-              </a:rPr>
-              <a:t>Data Security &amp; Scalability</a:t>
-            </a:r>
-            <a:endParaRPr lang="en-US" sz="2000" dirty="0"/>
-          </a:p>
-        </p:txBody>
-      </p:sp>
-      <p:sp>
-        <p:nvSpPr>
-          <p:cNvPr id="8" name="Text 6"/>
-          <p:cNvSpPr/>
-          <p:nvPr/>
-        </p:nvSpPr>
-        <p:spPr>
-          <a:xfrm>
-            <a:off x="914400" y="3566160"/>
-            <a:ext cx="7315200" cy="0"/>
-          </a:xfrm>
-          <a:prstGeom prst="rect">
-            <a:avLst/>
-          </a:prstGeom>
-          <a:noFill/>
-          <a:ln/>
-        </p:spPr>
-        <p:txBody>
-          <a:bodyPr wrap="square" rtlCol="0" anchor="ctr"/>
-          <a:lstStyle/>
-          <a:p>
-            <a:pPr indent="0" marL="0">
-              <a:buNone/>
-            </a:pPr>
-            <a:r>
-              <a:rPr lang="en-US" sz="1600" dirty="0">
-                <a:solidFill>
-                  <a:srgbClr val="555555"/>
-                </a:solidFill>
-              </a:rPr>
-              <a:t>Enterprise-grade encryption, cloud-ready for up to 50k users.</a:t>
-            </a:r>
-            <a:endParaRPr lang="en-US" sz="1600" dirty="0"/>
+              <a:rPr lang="en-US" sz="1800" b="1" dirty="0">
+                <a:solidFill>
+                  <a:srgbClr val="333333"/>
+                </a:solidFill>
+              </a:rPr>
+              <a:t>Financial Transparency: </a:t>
+            </a:r>
+            <a:pPr indent="0" marL="0">
+              <a:buNone/>
+            </a:pPr>
+            <a:r>
+              <a:rPr lang="en-US" sz="1800" dirty="0">
+                <a:solidFill>
+                  <a:srgbClr val="333333"/>
+                </a:solidFill>
+              </a:rPr>
+              <a:t>Real-time payment tracking and intelligent advance payment rollover systems.</a:t>
+            </a:r>
+            <a:endParaRPr lang="en-US" sz="1800" dirty="0"/>
+          </a:p>
+        </p:txBody>
+      </p:sp>
+      <p:sp>
+        <p:nvSpPr>
+          <p:cNvPr id="7" name="Text 5"/>
+          <p:cNvSpPr/>
+          <p:nvPr/>
+        </p:nvSpPr>
+        <p:spPr>
+          <a:xfrm>
+            <a:off x="457200" y="3383280"/>
+            <a:ext cx="8229600" cy="0"/>
+          </a:xfrm>
+          <a:prstGeom prst="rect">
+            <a:avLst/>
+          </a:prstGeom>
+          <a:noFill/>
+          <a:ln/>
+        </p:spPr>
+        <p:txBody>
+          <a:bodyPr wrap="square" lIns="127000" tIns="127000" rIns="127000" bIns="127000" rtlCol="0" anchor="ctr"/>
+          <a:lstStyle/>
+          <a:p>
+            <a:pPr marL="342900" indent="-342900">
+              <a:buSzPct val="100000"/>
+              <a:buChar char="•"/>
+            </a:pPr>
+            <a:r>
+              <a:rPr lang="en-US" sz="1800" b="1" dirty="0">
+                <a:solidFill>
+                  <a:srgbClr val="333333"/>
+                </a:solidFill>
+              </a:rPr>
+              <a:t>AI &amp; Real-Time Ready: </a:t>
+            </a:r>
+            <a:pPr indent="0" marL="0">
+              <a:buNone/>
+            </a:pPr>
+            <a:r>
+              <a:rPr lang="en-US" sz="1800" dirty="0">
+                <a:solidFill>
+                  <a:srgbClr val="333333"/>
+                </a:solidFill>
+              </a:rPr>
+              <a:t>Vapi AI voice/text assistant integrated alongside Socket.IO notifications.</a:t>
+            </a:r>
+            <a:endParaRPr lang="en-US" sz="1800" dirty="0"/>
           </a:p>
         </p:txBody>
       </p:sp>
@@ -3602,13 +4594,6 @@
 <file path=ppt/slides/slide9.xml><?xml version="1.0" encoding="utf-8"?>
 <p:sld xmlns:a="http://schemas.openxmlformats.org/drawingml/2006/main" xmlns:r="http://schemas.openxmlformats.org/officeDocument/2006/relationships" xmlns:p="http://schemas.openxmlformats.org/presentationml/2006/main">
   <p:cSld name="Slide 9">
-    <p:bg>
-      <p:bgPr>
-        <a:solidFill>
-          <a:srgbClr val="0F172A"/>
-        </a:solidFill>
-      </p:bgPr>
-    </p:bg>
     <p:spTree>
       <p:nvGrpSpPr>
         <p:cNvPr id="1" name=""/>
@@ -3631,8 +4616,8 @@
         </p:nvSpPr>
         <p:spPr>
           <a:xfrm>
-            <a:off x="914400" y="1828800"/>
-            <a:ext cx="7315200" cy="0"/>
+            <a:off x="457200" y="457200"/>
+            <a:ext cx="8229600" cy="0"/>
           </a:xfrm>
           <a:prstGeom prst="rect">
             <a:avLst/>
@@ -3644,18 +4629,18 @@
           <a:bodyPr wrap="square" rtlCol="0" anchor="ctr"/>
           <a:lstStyle/>
           <a:p>
-            <a:pPr algn="ctr" indent="0" marL="0">
-              <a:buNone/>
-            </a:pPr>
-            <a:r>
-              <a:rPr lang="en-US" sz="4800" b="1" dirty="0">
-                <a:solidFill>
-                  <a:srgbClr val="38BDF8"/>
-                </a:solidFill>
-              </a:rPr>
-              <a:t>Thank You</a:t>
-            </a:r>
-            <a:endParaRPr lang="en-US" sz="4800" dirty="0"/>
+            <a:pPr indent="0" marL="0">
+              <a:buNone/>
+            </a:pPr>
+            <a:r>
+              <a:rPr lang="en-US" sz="3600" b="1" dirty="0">
+                <a:solidFill>
+                  <a:srgbClr val="0F172A"/>
+                </a:solidFill>
+              </a:rPr>
+              <a:t>Future Work</a:t>
+            </a:r>
+            <a:endParaRPr lang="en-US" sz="3600" dirty="0"/>
           </a:p>
         </p:txBody>
       </p:sp>
@@ -3667,31 +4652,187 @@
         </p:nvSpPr>
         <p:spPr>
           <a:xfrm>
-            <a:off x="914400" y="2743200"/>
-            <a:ext cx="7315200" cy="0"/>
-          </a:xfrm>
-          <a:prstGeom prst="rect">
-            <a:avLst/>
-          </a:prstGeom>
-          <a:noFill/>
-          <a:ln/>
-        </p:spPr>
-        <p:txBody>
-          <a:bodyPr wrap="square" rtlCol="0" anchor="ctr"/>
-          <a:lstStyle/>
-          <a:p>
-            <a:pPr algn="ctr" indent="0" marL="0">
-              <a:buNone/>
-            </a:pPr>
-            <a:r>
-              <a:rPr lang="en-US" sz="2000" dirty="0">
-                <a:solidFill>
-                  <a:srgbClr val="CBD5E1"/>
-                </a:solidFill>
-              </a:rPr>
-              <a:t>Transforming Academic Operations with Modern Engineering</a:t>
-            </a:r>
-            <a:endParaRPr lang="en-US" sz="2000" dirty="0"/>
+            <a:off x="457200" y="1371600"/>
+            <a:ext cx="8229600" cy="0"/>
+          </a:xfrm>
+          <a:prstGeom prst="rect">
+            <a:avLst/>
+          </a:prstGeom>
+          <a:noFill/>
+          <a:ln/>
+        </p:spPr>
+        <p:txBody>
+          <a:bodyPr wrap="square" lIns="127000" tIns="127000" rIns="127000" bIns="127000" rtlCol="0" anchor="ctr"/>
+          <a:lstStyle/>
+          <a:p>
+            <a:pPr marL="342900" indent="-342900">
+              <a:buSzPct val="100000"/>
+              <a:buChar char="•"/>
+            </a:pPr>
+            <a:r>
+              <a:rPr lang="en-US" sz="1800" b="1" dirty="0">
+                <a:solidFill>
+                  <a:srgbClr val="333333"/>
+                </a:solidFill>
+              </a:rPr>
+              <a:t>AI and Machine Learning Integration:</a:t>
+            </a:r>
+            <a:pPr indent="0" marL="0">
+              <a:buNone/>
+            </a:pPr>
+            <a:r>
+              <a:rPr lang="en-US" sz="1800" dirty="0">
+                <a:solidFill>
+                  <a:srgbClr val="333333"/>
+                </a:solidFill>
+              </a:rPr>
+              <a:t> Predictive analytics for student performance and drop-out risks.</a:t>
+            </a:r>
+            <a:endParaRPr lang="en-US" sz="1800" dirty="0"/>
+          </a:p>
+        </p:txBody>
+      </p:sp>
+      <p:sp>
+        <p:nvSpPr>
+          <p:cNvPr id="4" name="Text 2"/>
+          <p:cNvSpPr/>
+          <p:nvPr/>
+        </p:nvSpPr>
+        <p:spPr>
+          <a:xfrm>
+            <a:off x="457200" y="2103120"/>
+            <a:ext cx="8229600" cy="0"/>
+          </a:xfrm>
+          <a:prstGeom prst="rect">
+            <a:avLst/>
+          </a:prstGeom>
+          <a:noFill/>
+          <a:ln/>
+        </p:spPr>
+        <p:txBody>
+          <a:bodyPr wrap="square" lIns="127000" tIns="127000" rIns="127000" bIns="127000" rtlCol="0" anchor="ctr"/>
+          <a:lstStyle/>
+          <a:p>
+            <a:pPr marL="342900" indent="-342900">
+              <a:buSzPct val="100000"/>
+              <a:buChar char="•"/>
+            </a:pPr>
+            <a:r>
+              <a:rPr lang="en-US" sz="1800" b="1" dirty="0">
+                <a:solidFill>
+                  <a:srgbClr val="333333"/>
+                </a:solidFill>
+              </a:rPr>
+              <a:t>Advanced Mobile App:</a:t>
+            </a:r>
+            <a:pPr indent="0" marL="0">
+              <a:buNone/>
+            </a:pPr>
+            <a:r>
+              <a:rPr lang="en-US" sz="1800" dirty="0">
+                <a:solidFill>
+                  <a:srgbClr val="333333"/>
+                </a:solidFill>
+              </a:rPr>
+              <a:t> Developing native iOS and Android applications with offline capabilities.</a:t>
+            </a:r>
+            <a:endParaRPr lang="en-US" sz="1800" dirty="0"/>
+          </a:p>
+        </p:txBody>
+      </p:sp>
+      <p:sp>
+        <p:nvSpPr>
+          <p:cNvPr id="5" name="Text 3"/>
+          <p:cNvSpPr/>
+          <p:nvPr/>
+        </p:nvSpPr>
+        <p:spPr>
+          <a:xfrm>
+            <a:off x="457200" y="2834640"/>
+            <a:ext cx="8229600" cy="0"/>
+          </a:xfrm>
+          <a:prstGeom prst="rect">
+            <a:avLst/>
+          </a:prstGeom>
+          <a:noFill/>
+          <a:ln/>
+        </p:spPr>
+        <p:txBody>
+          <a:bodyPr wrap="square" lIns="127000" tIns="127000" rIns="127000" bIns="127000" rtlCol="0" anchor="ctr"/>
+          <a:lstStyle/>
+          <a:p>
+            <a:pPr marL="342900" indent="-342900">
+              <a:buSzPct val="100000"/>
+              <a:buChar char="•"/>
+            </a:pPr>
+            <a:r>
+              <a:rPr lang="en-US" sz="1800" b="1" dirty="0">
+                <a:solidFill>
+                  <a:srgbClr val="333333"/>
+                </a:solidFill>
+              </a:rPr>
+              <a:t>Multi-language Support:</a:t>
+            </a:r>
+            <a:pPr indent="0" marL="0">
+              <a:buNone/>
+            </a:pPr>
+            <a:r>
+              <a:rPr lang="en-US" sz="1800" dirty="0">
+                <a:solidFill>
+                  <a:srgbClr val="333333"/>
+                </a:solidFill>
+              </a:rPr>
+              <a:t> Expanding localization to support diverse institutional requirements.</a:t>
+            </a:r>
+            <a:endParaRPr lang="en-US" sz="1800" dirty="0"/>
+          </a:p>
+        </p:txBody>
+      </p:sp>
+      <p:sp>
+        <p:nvSpPr>
+          <p:cNvPr id="6" name="Text 4"/>
+          <p:cNvSpPr/>
+          <p:nvPr/>
+        </p:nvSpPr>
+        <p:spPr>
+          <a:xfrm>
+            <a:off x="457200" y="3566160"/>
+            <a:ext cx="8229600" cy="0"/>
+          </a:xfrm>
+          <a:prstGeom prst="rect">
+            <a:avLst/>
+          </a:prstGeom>
+          <a:noFill/>
+          <a:ln/>
+        </p:spPr>
+        <p:txBody>
+          <a:bodyPr wrap="square" lIns="127000" tIns="127000" rIns="127000" bIns="127000" rtlCol="0" anchor="ctr"/>
+          <a:lstStyle/>
+          <a:p>
+            <a:pPr marL="342900" indent="-342900">
+              <a:buSzPct val="100000"/>
+              <a:buChar char="•"/>
+            </a:pPr>
+            <a:r>
+              <a:rPr lang="en-US" sz="1800" b="1" dirty="0">
+                <a:solidFill>
+                  <a:srgbClr val="333333"/>
+                </a:solidFill>
+              </a:rPr>
+              <a:t>Alumni Network Module:</a:t>
+            </a:r>
+            <a:pPr indent="0" marL="0">
+              <a:buNone/>
+            </a:pPr>
+            <a:r>
+              <a:rPr lang="en-US" sz="1800" dirty="0">
+                <a:solidFill>
+                  <a:srgbClr val="333333"/>
+                </a:solidFill>
+              </a:rPr>
+              <a:t> A dedicated portal for connecting current students with alumni for mentorship.</a:t>
+            </a:r>
+            <a:endParaRPr lang="en-US" sz="1800" dirty="0"/>
           </a:p>
         </p:txBody>
       </p:sp>
